--- a/python-course-ppt/逐节课件/Python讲授课件-单元06.pptx
+++ b/python-course-ppt/逐节课件/Python讲授课件-单元06.pptx
@@ -236,1254 +236,6 @@
     </a:lvl9pPr>
   </p:notesStyle>
 </p:notesMaster>
-</file>
-
-<file path=ppt/notesSlides/notesSlide1.xml><?xml version="1.0" encoding="utf-8"?>
-<p:notes xmlns:a="http://schemas.openxmlformats.org/drawingml/2006/main" xmlns:p="http://schemas.openxmlformats.org/presentationml/2006/main" xmlns:r="http://schemas.openxmlformats.org/officeDocument/2006/relationships">
-  <p:cSld>
-    <p:spTree>
-      <p:nvGrpSpPr>
-        <p:cNvPr id="1" name=""/>
-        <p:cNvGrpSpPr/>
-        <p:nvPr/>
-      </p:nvGrpSpPr>
-      <p:grpSpPr>
-        <a:xfrm>
-          <a:off x="0" y="0"/>
-          <a:ext cx="0" cy="0"/>
-          <a:chOff x="0" y="0"/>
-          <a:chExt cx="0" cy="0"/>
-        </a:xfrm>
-      </p:grpSpPr>
-      <p:sp>
-        <p:nvSpPr>
-          <p:cNvPr id="2" name="讲课提示"/>
-          <p:cNvSpPr txBox="1"/>
-          <p:nvPr/>
-        </p:nvSpPr>
-        <p:spPr>
-          <a:xfrm>
-            <a:off x="457200" y="457200"/>
-            <a:ext cx="6858000" cy="4800600"/>
-          </a:xfrm>
-          <a:prstGeom prst="rect">
-            <a:avLst/>
-          </a:prstGeom>
-        </p:spPr>
-        <p:txBody>
-          <a:bodyPr wrap="square"/>
-          <a:lstStyle/>
-          <a:p>
-            <a:r>
-              <a:rPr lang="zh-CN" dirty="0"/>
-              <a:t>单元 6 · 单元 6 · 用户输入与 while 循环</a:t>
-            </a:r>
-          </a:p>
-          <a:p>
-            <a:r>
-              <a:rPr lang="zh-CN" dirty="0"/>
-              <a:t/>
-            </a:r>
-          </a:p>
-          <a:p>
-            <a:r>
-              <a:rPr lang="zh-CN" dirty="0"/>
-              <a:t>本单元包含以下课节：</a:t>
-            </a:r>
-          </a:p>
-          <a:p>
-            <a:r>
-              <a:rPr lang="zh-CN" dirty="0"/>
-              <a:t>· 第 28 节 input() 的铁律与 for/while 之争</a:t>
-            </a:r>
-          </a:p>
-          <a:p>
-            <a:r>
-              <a:rPr lang="zh-CN" dirty="0"/>
-              <a:t>· 第 29 节 break / continue / while-else</a:t>
-            </a:r>
-          </a:p>
-          <a:p>
-            <a:r>
-              <a:rPr lang="zh-CN" dirty="0"/>
-              <a:t>· 第 30 节 交互程序的骨架与收尾</a:t>
-            </a:r>
-          </a:p>
-          <a:p>
-            <a:r>
-              <a:rPr lang="zh-CN" dirty="0"/>
-              <a:t>· 第 31 节 动手实战与答案讲评</a:t>
-            </a:r>
-          </a:p>
-          <a:p>
-            <a:r>
-              <a:rPr lang="zh-CN" dirty="0"/>
-              <a:t>· 第 32 节 单元 6 验收复盘</a:t>
-            </a:r>
-          </a:p>
-          <a:p>
-            <a:r>
-              <a:rPr lang="zh-CN" dirty="0"/>
-              <a:t/>
-            </a:r>
-          </a:p>
-          <a:p>
-            <a:r>
-              <a:rPr lang="zh-CN" dirty="0"/>
-              <a:t>开场用 3 分钟讲清：这个单元学完能做出什么，最后会被关卡怎么验。</a:t>
-            </a:r>
-          </a:p>
-        </p:txBody>
-      </p:sp>
-    </p:spTree>
-  </p:cSld>
-  <p:clrMapOvr>
-    <a:masterClrMapping/>
-  </p:clrMapOvr>
-</p:notes>
-</file>
-
-<file path=ppt/notesSlides/notesSlide10.xml><?xml version="1.0" encoding="utf-8"?>
-<p:notes xmlns:a="http://schemas.openxmlformats.org/drawingml/2006/main" xmlns:p="http://schemas.openxmlformats.org/presentationml/2006/main" xmlns:r="http://schemas.openxmlformats.org/officeDocument/2006/relationships">
-  <p:cSld>
-    <p:spTree>
-      <p:nvGrpSpPr>
-        <p:cNvPr id="1" name=""/>
-        <p:cNvGrpSpPr/>
-        <p:nvPr/>
-      </p:nvGrpSpPr>
-      <p:grpSpPr>
-        <a:xfrm>
-          <a:off x="0" y="0"/>
-          <a:ext cx="0" cy="0"/>
-          <a:chOff x="0" y="0"/>
-          <a:chExt cx="0" cy="0"/>
-        </a:xfrm>
-      </p:grpSpPr>
-      <p:sp>
-        <p:nvSpPr>
-          <p:cNvPr id="2" name="讲课提示"/>
-          <p:cNvSpPr txBox="1"/>
-          <p:nvPr/>
-        </p:nvSpPr>
-        <p:spPr>
-          <a:xfrm>
-            <a:off x="457200" y="457200"/>
-            <a:ext cx="6858000" cy="4800600"/>
-          </a:xfrm>
-          <a:prstGeom prst="rect">
-            <a:avLst/>
-          </a:prstGeom>
-        </p:spPr>
-        <p:txBody>
-          <a:bodyPr wrap="square"/>
-          <a:lstStyle/>
-          <a:p>
-            <a:r>
-              <a:rPr lang="zh-CN" dirty="0"/>
-              <a:t>第 32 节 · 单元 6 验收复盘</a:t>
-            </a:r>
-          </a:p>
-          <a:p>
-            <a:r>
-              <a:rPr lang="zh-CN" dirty="0"/>
-              <a:t>单元 6 · 用户输入与 while 循环 · W6</a:t>
-            </a:r>
-          </a:p>
-          <a:p>
-            <a:r>
-              <a:rPr lang="zh-CN" dirty="0"/>
-              <a:t/>
-            </a:r>
-          </a:p>
-          <a:p>
-            <a:r>
-              <a:rPr lang="zh-CN" dirty="0"/>
-              <a:t>学习目标：确认 input 转换、循环控制、交互骨架都过关</a:t>
-            </a:r>
-          </a:p>
-          <a:p>
-            <a:r>
-              <a:rPr lang="zh-CN" dirty="0"/>
-              <a:t/>
-            </a:r>
-          </a:p>
-          <a:p>
-            <a:r>
-              <a:rPr lang="zh-CN" dirty="0"/>
-              <a:t>课堂实操（40 分钟，不看答案）：</a:t>
-            </a:r>
-          </a:p>
-          <a:p>
-            <a:r>
-              <a:rPr lang="zh-CN" dirty="0"/>
-              <a:t>· 逐条打勾验收自测</a:t>
-            </a:r>
-          </a:p>
-          <a:p>
-            <a:r>
-              <a:rPr lang="zh-CN" dirty="0"/>
-              <a:t>· 现场演示死循环的自救过程</a:t>
-            </a:r>
-          </a:p>
-          <a:p>
-            <a:r>
-              <a:rPr lang="zh-CN" dirty="0"/>
-              <a:t/>
-            </a:r>
-          </a:p>
-          <a:p>
-            <a:r>
-              <a:rPr lang="zh-CN" dirty="0"/>
-              <a:t>课后作业：</a:t>
-            </a:r>
-          </a:p>
-          <a:p>
-            <a:r>
-              <a:rPr lang="zh-CN" dirty="0"/>
-              <a:t>· 完成本单元小结与产出检查</a:t>
-            </a:r>
-          </a:p>
-          <a:p>
-            <a:r>
-              <a:rPr lang="zh-CN" dirty="0"/>
-              <a:t/>
-            </a:r>
-          </a:p>
-          <a:p>
-            <a:r>
-              <a:rPr lang="zh-CN" dirty="0"/>
-              <a:t>节奏：讲 20 分钟 → 学员自己敲 40 分钟（不看答案）→ 对讲评自查 20 分钟 → 写作业 10 分钟。</a:t>
-            </a:r>
-          </a:p>
-        </p:txBody>
-      </p:sp>
-    </p:spTree>
-  </p:cSld>
-  <p:clrMapOvr>
-    <a:masterClrMapping/>
-  </p:clrMapOvr>
-</p:notes>
-</file>
-
-<file path=ppt/notesSlides/notesSlide11.xml><?xml version="1.0" encoding="utf-8"?>
-<p:notes xmlns:a="http://schemas.openxmlformats.org/drawingml/2006/main" xmlns:p="http://schemas.openxmlformats.org/presentationml/2006/main" xmlns:r="http://schemas.openxmlformats.org/officeDocument/2006/relationships">
-  <p:cSld>
-    <p:spTree>
-      <p:nvGrpSpPr>
-        <p:cNvPr id="1" name=""/>
-        <p:cNvGrpSpPr/>
-        <p:nvPr/>
-      </p:nvGrpSpPr>
-      <p:grpSpPr>
-        <a:xfrm>
-          <a:off x="0" y="0"/>
-          <a:ext cx="0" cy="0"/>
-          <a:chOff x="0" y="0"/>
-          <a:chExt cx="0" cy="0"/>
-        </a:xfrm>
-      </p:grpSpPr>
-      <p:sp>
-        <p:nvSpPr>
-          <p:cNvPr id="2" name="讲课提示"/>
-          <p:cNvSpPr txBox="1"/>
-          <p:nvPr/>
-        </p:nvSpPr>
-        <p:spPr>
-          <a:xfrm>
-            <a:off x="457200" y="457200"/>
-            <a:ext cx="6858000" cy="4800600"/>
-          </a:xfrm>
-          <a:prstGeom prst="rect">
-            <a:avLst/>
-          </a:prstGeom>
-        </p:spPr>
-        <p:txBody>
-          <a:bodyPr wrap="square"/>
-          <a:lstStyle/>
-          <a:p>
-            <a:r>
-              <a:rPr lang="zh-CN" dirty="0"/>
-              <a:t>第 32 节 · 核心知识点：单元 6 验收复盘</a:t>
-            </a:r>
-          </a:p>
-          <a:p>
-            <a:r>
-              <a:rPr lang="zh-CN" dirty="0"/>
-              <a:t/>
-            </a:r>
-          </a:p>
-          <a:p>
-            <a:r>
-              <a:rPr lang="zh-CN" dirty="0"/>
-              <a:t>讲这一页时：先让学生说出上节课的结论，再逐块讲要点。</a:t>
-            </a:r>
-          </a:p>
-          <a:p>
-            <a:r>
-              <a:rPr lang="zh-CN" dirty="0"/>
-              <a:t>每讲完一块，问一句「这一步如果写错了，报错会长什么样？」——把错误提前讲。</a:t>
-            </a:r>
-          </a:p>
-          <a:p>
-            <a:r>
-              <a:rPr lang="zh-CN" dirty="0"/>
-              <a:t/>
-            </a:r>
-          </a:p>
-          <a:p>
-            <a:r>
-              <a:rPr lang="zh-CN" dirty="0"/>
-              <a:t>本节目标：确认 input 转换、循环控制、交互骨架都过关</a:t>
-            </a:r>
-          </a:p>
-          <a:p>
-            <a:r>
-              <a:rPr lang="zh-CN" dirty="0"/>
-              <a:t/>
-            </a:r>
-          </a:p>
-          <a:p>
-            <a:r>
-              <a:rPr lang="zh-CN" dirty="0"/>
-              <a:t>看不到懂的地方，回讲义对应小节读一遍，再回来对着这页复述一次——能讲出来才算真懂。</a:t>
-            </a:r>
-          </a:p>
-        </p:txBody>
-      </p:sp>
-    </p:spTree>
-  </p:cSld>
-  <p:clrMapOvr>
-    <a:masterClrMapping/>
-  </p:clrMapOvr>
-</p:notes>
-</file>
-
-<file path=ppt/notesSlides/notesSlide12.xml><?xml version="1.0" encoding="utf-8"?>
-<p:notes xmlns:a="http://schemas.openxmlformats.org/drawingml/2006/main" xmlns:p="http://schemas.openxmlformats.org/presentationml/2006/main" xmlns:r="http://schemas.openxmlformats.org/officeDocument/2006/relationships">
-  <p:cSld>
-    <p:spTree>
-      <p:nvGrpSpPr>
-        <p:cNvPr id="1" name=""/>
-        <p:cNvGrpSpPr/>
-        <p:nvPr/>
-      </p:nvGrpSpPr>
-      <p:grpSpPr>
-        <a:xfrm>
-          <a:off x="0" y="0"/>
-          <a:ext cx="0" cy="0"/>
-          <a:chOff x="0" y="0"/>
-          <a:chExt cx="0" cy="0"/>
-        </a:xfrm>
-      </p:grpSpPr>
-      <p:sp>
-        <p:nvSpPr>
-          <p:cNvPr id="2" name="讲课提示"/>
-          <p:cNvSpPr txBox="1"/>
-          <p:nvPr/>
-        </p:nvSpPr>
-        <p:spPr>
-          <a:xfrm>
-            <a:off x="457200" y="457200"/>
-            <a:ext cx="6858000" cy="4800600"/>
-          </a:xfrm>
-          <a:prstGeom prst="rect">
-            <a:avLst/>
-          </a:prstGeom>
-        </p:spPr>
-        <p:txBody>
-          <a:bodyPr wrap="square"/>
-          <a:lstStyle/>
-          <a:p>
-            <a:r>
-              <a:rPr lang="zh-CN" dirty="0"/>
-              <a:t>单元 6 小结 · 单元 6 · 小结</a:t>
-            </a:r>
-          </a:p>
-          <a:p>
-            <a:r>
-              <a:rPr lang="zh-CN" dirty="0"/>
-              <a:t/>
-            </a:r>
-          </a:p>
-          <a:p>
-            <a:r>
-              <a:rPr lang="zh-CN" dirty="0"/>
-              <a:t>收尾动作：让学生合上讲义，口述本单元三个最重要的结论；说不出来的，回对应课节。</a:t>
-            </a:r>
-          </a:p>
-          <a:p>
-            <a:r>
-              <a:rPr lang="zh-CN" dirty="0"/>
-              <a:t>然后当场勾一遍本单元课节的「已完成」，没打勾的进下一单元前补掉。</a:t>
-            </a:r>
-          </a:p>
-        </p:txBody>
-      </p:sp>
-    </p:spTree>
-  </p:cSld>
-  <p:clrMapOvr>
-    <a:masterClrMapping/>
-  </p:clrMapOvr>
-</p:notes>
-</file>
-
-<file path=ppt/notesSlides/notesSlide2.xml><?xml version="1.0" encoding="utf-8"?>
-<p:notes xmlns:a="http://schemas.openxmlformats.org/drawingml/2006/main" xmlns:p="http://schemas.openxmlformats.org/presentationml/2006/main" xmlns:r="http://schemas.openxmlformats.org/officeDocument/2006/relationships">
-  <p:cSld>
-    <p:spTree>
-      <p:nvGrpSpPr>
-        <p:cNvPr id="1" name=""/>
-        <p:cNvGrpSpPr/>
-        <p:nvPr/>
-      </p:nvGrpSpPr>
-      <p:grpSpPr>
-        <a:xfrm>
-          <a:off x="0" y="0"/>
-          <a:ext cx="0" cy="0"/>
-          <a:chOff x="0" y="0"/>
-          <a:chExt cx="0" cy="0"/>
-        </a:xfrm>
-      </p:grpSpPr>
-      <p:sp>
-        <p:nvSpPr>
-          <p:cNvPr id="2" name="讲课提示"/>
-          <p:cNvSpPr txBox="1"/>
-          <p:nvPr/>
-        </p:nvSpPr>
-        <p:spPr>
-          <a:xfrm>
-            <a:off x="457200" y="457200"/>
-            <a:ext cx="6858000" cy="4800600"/>
-          </a:xfrm>
-          <a:prstGeom prst="rect">
-            <a:avLst/>
-          </a:prstGeom>
-        </p:spPr>
-        <p:txBody>
-          <a:bodyPr wrap="square"/>
-          <a:lstStyle/>
-          <a:p>
-            <a:r>
-              <a:rPr lang="zh-CN" dirty="0"/>
-              <a:t>第 28 节 · input() 的铁律与 for/while 之争</a:t>
-            </a:r>
-          </a:p>
-          <a:p>
-            <a:r>
-              <a:rPr lang="zh-CN" dirty="0"/>
-              <a:t>单元 6 · 用户输入与 while 循环 · W6</a:t>
-            </a:r>
-          </a:p>
-          <a:p>
-            <a:r>
-              <a:rPr lang="zh-CN" dirty="0"/>
-              <a:t/>
-            </a:r>
-          </a:p>
-          <a:p>
-            <a:r>
-              <a:rPr lang="zh-CN" dirty="0"/>
-              <a:t>学习目标：牢记「拿回来的永远是字符串」，知道什么时候该用 while</a:t>
-            </a:r>
-          </a:p>
-          <a:p>
-            <a:r>
-              <a:rPr lang="zh-CN" dirty="0"/>
-              <a:t/>
-            </a:r>
-          </a:p>
-          <a:p>
-            <a:r>
-              <a:rPr lang="zh-CN" dirty="0"/>
-              <a:t>课堂实操（40 分钟，不看答案）：</a:t>
-            </a:r>
-          </a:p>
-          <a:p>
-            <a:r>
-              <a:rPr lang="zh-CN" dirty="0"/>
-              <a:t>· 故意不写 int() 体会类型陷阱</a:t>
-            </a:r>
-          </a:p>
-          <a:p>
-            <a:r>
-              <a:rPr lang="zh-CN" dirty="0"/>
-              <a:t>· 现场写一个死循环再自救</a:t>
-            </a:r>
-          </a:p>
-          <a:p>
-            <a:r>
-              <a:rPr lang="zh-CN" dirty="0"/>
-              <a:t/>
-            </a:r>
-          </a:p>
-          <a:p>
-            <a:r>
-              <a:rPr lang="zh-CN" dirty="0"/>
-              <a:t>课后作业：</a:t>
-            </a:r>
-          </a:p>
-          <a:p>
-            <a:r>
-              <a:rPr lang="zh-CN" dirty="0"/>
-              <a:t>· 完成动手练习 6-1 ~ 6-3</a:t>
-            </a:r>
-          </a:p>
-          <a:p>
-            <a:r>
-              <a:rPr lang="zh-CN" dirty="0"/>
-              <a:t/>
-            </a:r>
-          </a:p>
-          <a:p>
-            <a:r>
-              <a:rPr lang="zh-CN" dirty="0"/>
-              <a:t>节奏：讲 20 分钟 → 学员自己敲 40 分钟（不看答案）→ 对讲评自查 20 分钟 → 写作业 10 分钟。</a:t>
-            </a:r>
-          </a:p>
-        </p:txBody>
-      </p:sp>
-    </p:spTree>
-  </p:cSld>
-  <p:clrMapOvr>
-    <a:masterClrMapping/>
-  </p:clrMapOvr>
-</p:notes>
-</file>
-
-<file path=ppt/notesSlides/notesSlide3.xml><?xml version="1.0" encoding="utf-8"?>
-<p:notes xmlns:a="http://schemas.openxmlformats.org/drawingml/2006/main" xmlns:p="http://schemas.openxmlformats.org/presentationml/2006/main" xmlns:r="http://schemas.openxmlformats.org/officeDocument/2006/relationships">
-  <p:cSld>
-    <p:spTree>
-      <p:nvGrpSpPr>
-        <p:cNvPr id="1" name=""/>
-        <p:cNvGrpSpPr/>
-        <p:nvPr/>
-      </p:nvGrpSpPr>
-      <p:grpSpPr>
-        <a:xfrm>
-          <a:off x="0" y="0"/>
-          <a:ext cx="0" cy="0"/>
-          <a:chOff x="0" y="0"/>
-          <a:chExt cx="0" cy="0"/>
-        </a:xfrm>
-      </p:grpSpPr>
-      <p:sp>
-        <p:nvSpPr>
-          <p:cNvPr id="2" name="讲课提示"/>
-          <p:cNvSpPr txBox="1"/>
-          <p:nvPr/>
-        </p:nvSpPr>
-        <p:spPr>
-          <a:xfrm>
-            <a:off x="457200" y="457200"/>
-            <a:ext cx="6858000" cy="4800600"/>
-          </a:xfrm>
-          <a:prstGeom prst="rect">
-            <a:avLst/>
-          </a:prstGeom>
-        </p:spPr>
-        <p:txBody>
-          <a:bodyPr wrap="square"/>
-          <a:lstStyle/>
-          <a:p>
-            <a:r>
-              <a:rPr lang="zh-CN" dirty="0"/>
-              <a:t>第 28 节 · 核心知识点：input() 的铁律与 for/while 之争</a:t>
-            </a:r>
-          </a:p>
-          <a:p>
-            <a:r>
-              <a:rPr lang="zh-CN" dirty="0"/>
-              <a:t/>
-            </a:r>
-          </a:p>
-          <a:p>
-            <a:r>
-              <a:rPr lang="zh-CN" dirty="0"/>
-              <a:t>讲这一页时：先让学生说出上节课的结论，再逐块讲要点。</a:t>
-            </a:r>
-          </a:p>
-          <a:p>
-            <a:r>
-              <a:rPr lang="zh-CN" dirty="0"/>
-              <a:t>每讲完一块，问一句「这一步如果写错了，报错会长什么样？」——把错误提前讲。</a:t>
-            </a:r>
-          </a:p>
-          <a:p>
-            <a:r>
-              <a:rPr lang="zh-CN" dirty="0"/>
-              <a:t/>
-            </a:r>
-          </a:p>
-          <a:p>
-            <a:r>
-              <a:rPr lang="zh-CN" dirty="0"/>
-              <a:t>本节目标：牢记「拿回来的永远是字符串」，知道什么时候该用 while</a:t>
-            </a:r>
-          </a:p>
-          <a:p>
-            <a:r>
-              <a:rPr lang="zh-CN" dirty="0"/>
-              <a:t/>
-            </a:r>
-          </a:p>
-          <a:p>
-            <a:r>
-              <a:rPr lang="zh-CN" dirty="0"/>
-              <a:t>看不到懂的地方，回讲义对应小节读一遍，再回来对着这页复述一次——能讲出来才算真懂。</a:t>
-            </a:r>
-          </a:p>
-        </p:txBody>
-      </p:sp>
-    </p:spTree>
-  </p:cSld>
-  <p:clrMapOvr>
-    <a:masterClrMapping/>
-  </p:clrMapOvr>
-</p:notes>
-</file>
-
-<file path=ppt/notesSlides/notesSlide4.xml><?xml version="1.0" encoding="utf-8"?>
-<p:notes xmlns:a="http://schemas.openxmlformats.org/drawingml/2006/main" xmlns:p="http://schemas.openxmlformats.org/presentationml/2006/main" xmlns:r="http://schemas.openxmlformats.org/officeDocument/2006/relationships">
-  <p:cSld>
-    <p:spTree>
-      <p:nvGrpSpPr>
-        <p:cNvPr id="1" name=""/>
-        <p:cNvGrpSpPr/>
-        <p:nvPr/>
-      </p:nvGrpSpPr>
-      <p:grpSpPr>
-        <a:xfrm>
-          <a:off x="0" y="0"/>
-          <a:ext cx="0" cy="0"/>
-          <a:chOff x="0" y="0"/>
-          <a:chExt cx="0" cy="0"/>
-        </a:xfrm>
-      </p:grpSpPr>
-      <p:sp>
-        <p:nvSpPr>
-          <p:cNvPr id="2" name="讲课提示"/>
-          <p:cNvSpPr txBox="1"/>
-          <p:nvPr/>
-        </p:nvSpPr>
-        <p:spPr>
-          <a:xfrm>
-            <a:off x="457200" y="457200"/>
-            <a:ext cx="6858000" cy="4800600"/>
-          </a:xfrm>
-          <a:prstGeom prst="rect">
-            <a:avLst/>
-          </a:prstGeom>
-        </p:spPr>
-        <p:txBody>
-          <a:bodyPr wrap="square"/>
-          <a:lstStyle/>
-          <a:p>
-            <a:r>
-              <a:rPr lang="zh-CN" dirty="0"/>
-              <a:t>第 29 节 · break / continue / while-else</a:t>
-            </a:r>
-          </a:p>
-          <a:p>
-            <a:r>
-              <a:rPr lang="zh-CN" dirty="0"/>
-              <a:t>单元 6 · 用户输入与 while 循环 · W6</a:t>
-            </a:r>
-          </a:p>
-          <a:p>
-            <a:r>
-              <a:rPr lang="zh-CN" dirty="0"/>
-              <a:t/>
-            </a:r>
-          </a:p>
-          <a:p>
-            <a:r>
-              <a:rPr lang="zh-CN" dirty="0"/>
-              <a:t>学习目标：掌握 break、continue 与 while...else 的执行时机</a:t>
-            </a:r>
-          </a:p>
-          <a:p>
-            <a:r>
-              <a:rPr lang="zh-CN" dirty="0"/>
-              <a:t/>
-            </a:r>
-          </a:p>
-          <a:p>
-            <a:r>
-              <a:rPr lang="zh-CN" dirty="0"/>
-              <a:t>课堂实操（40 分钟，不看答案）：</a:t>
-            </a:r>
-          </a:p>
-          <a:p>
-            <a:r>
-              <a:rPr lang="zh-CN" dirty="0"/>
-              <a:t>· 写一个只接受正数的输入循环，故意输入字母看是否崩</a:t>
-            </a:r>
-          </a:p>
-          <a:p>
-            <a:r>
-              <a:rPr lang="zh-CN" dirty="0"/>
-              <a:t>· 演示 while...else 的执行时机</a:t>
-            </a:r>
-          </a:p>
-          <a:p>
-            <a:r>
-              <a:rPr lang="zh-CN" dirty="0"/>
-              <a:t/>
-            </a:r>
-          </a:p>
-          <a:p>
-            <a:r>
-              <a:rPr lang="zh-CN" dirty="0"/>
-              <a:t>课后作业：</a:t>
-            </a:r>
-          </a:p>
-          <a:p>
-            <a:r>
-              <a:rPr lang="zh-CN" dirty="0"/>
-              <a:t>· 完成动手练习 6-4 ~ 6-6</a:t>
-            </a:r>
-          </a:p>
-          <a:p>
-            <a:r>
-              <a:rPr lang="zh-CN" dirty="0"/>
-              <a:t/>
-            </a:r>
-          </a:p>
-          <a:p>
-            <a:r>
-              <a:rPr lang="zh-CN" dirty="0"/>
-              <a:t>节奏：讲 20 分钟 → 学员自己敲 40 分钟（不看答案）→ 对讲评自查 20 分钟 → 写作业 10 分钟。</a:t>
-            </a:r>
-          </a:p>
-        </p:txBody>
-      </p:sp>
-    </p:spTree>
-  </p:cSld>
-  <p:clrMapOvr>
-    <a:masterClrMapping/>
-  </p:clrMapOvr>
-</p:notes>
-</file>
-
-<file path=ppt/notesSlides/notesSlide5.xml><?xml version="1.0" encoding="utf-8"?>
-<p:notes xmlns:a="http://schemas.openxmlformats.org/drawingml/2006/main" xmlns:p="http://schemas.openxmlformats.org/presentationml/2006/main" xmlns:r="http://schemas.openxmlformats.org/officeDocument/2006/relationships">
-  <p:cSld>
-    <p:spTree>
-      <p:nvGrpSpPr>
-        <p:cNvPr id="1" name=""/>
-        <p:cNvGrpSpPr/>
-        <p:nvPr/>
-      </p:nvGrpSpPr>
-      <p:grpSpPr>
-        <a:xfrm>
-          <a:off x="0" y="0"/>
-          <a:ext cx="0" cy="0"/>
-          <a:chOff x="0" y="0"/>
-          <a:chExt cx="0" cy="0"/>
-        </a:xfrm>
-      </p:grpSpPr>
-      <p:sp>
-        <p:nvSpPr>
-          <p:cNvPr id="2" name="讲课提示"/>
-          <p:cNvSpPr txBox="1"/>
-          <p:nvPr/>
-        </p:nvSpPr>
-        <p:spPr>
-          <a:xfrm>
-            <a:off x="457200" y="457200"/>
-            <a:ext cx="6858000" cy="4800600"/>
-          </a:xfrm>
-          <a:prstGeom prst="rect">
-            <a:avLst/>
-          </a:prstGeom>
-        </p:spPr>
-        <p:txBody>
-          <a:bodyPr wrap="square"/>
-          <a:lstStyle/>
-          <a:p>
-            <a:r>
-              <a:rPr lang="zh-CN" dirty="0"/>
-              <a:t>第 29 节 · 核心知识点：break / continue / while-else</a:t>
-            </a:r>
-          </a:p>
-          <a:p>
-            <a:r>
-              <a:rPr lang="zh-CN" dirty="0"/>
-              <a:t/>
-            </a:r>
-          </a:p>
-          <a:p>
-            <a:r>
-              <a:rPr lang="zh-CN" dirty="0"/>
-              <a:t>讲这一页时：先让学生说出上节课的结论，再逐块讲要点。</a:t>
-            </a:r>
-          </a:p>
-          <a:p>
-            <a:r>
-              <a:rPr lang="zh-CN" dirty="0"/>
-              <a:t>每讲完一块，问一句「这一步如果写错了，报错会长什么样？」——把错误提前讲。</a:t>
-            </a:r>
-          </a:p>
-          <a:p>
-            <a:r>
-              <a:rPr lang="zh-CN" dirty="0"/>
-              <a:t/>
-            </a:r>
-          </a:p>
-          <a:p>
-            <a:r>
-              <a:rPr lang="zh-CN" dirty="0"/>
-              <a:t>本节目标：掌握 break、continue 与 while...else 的执行时机</a:t>
-            </a:r>
-          </a:p>
-          <a:p>
-            <a:r>
-              <a:rPr lang="zh-CN" dirty="0"/>
-              <a:t/>
-            </a:r>
-          </a:p>
-          <a:p>
-            <a:r>
-              <a:rPr lang="zh-CN" dirty="0"/>
-              <a:t>看不到懂的地方，回讲义对应小节读一遍，再回来对着这页复述一次——能讲出来才算真懂。</a:t>
-            </a:r>
-          </a:p>
-        </p:txBody>
-      </p:sp>
-    </p:spTree>
-  </p:cSld>
-  <p:clrMapOvr>
-    <a:masterClrMapping/>
-  </p:clrMapOvr>
-</p:notes>
-</file>
-
-<file path=ppt/notesSlides/notesSlide6.xml><?xml version="1.0" encoding="utf-8"?>
-<p:notes xmlns:a="http://schemas.openxmlformats.org/drawingml/2006/main" xmlns:p="http://schemas.openxmlformats.org/presentationml/2006/main" xmlns:r="http://schemas.openxmlformats.org/officeDocument/2006/relationships">
-  <p:cSld>
-    <p:spTree>
-      <p:nvGrpSpPr>
-        <p:cNvPr id="1" name=""/>
-        <p:cNvGrpSpPr/>
-        <p:nvPr/>
-      </p:nvGrpSpPr>
-      <p:grpSpPr>
-        <a:xfrm>
-          <a:off x="0" y="0"/>
-          <a:ext cx="0" cy="0"/>
-          <a:chOff x="0" y="0"/>
-          <a:chExt cx="0" cy="0"/>
-        </a:xfrm>
-      </p:grpSpPr>
-      <p:sp>
-        <p:nvSpPr>
-          <p:cNvPr id="2" name="讲课提示"/>
-          <p:cNvSpPr txBox="1"/>
-          <p:nvPr/>
-        </p:nvSpPr>
-        <p:spPr>
-          <a:xfrm>
-            <a:off x="457200" y="457200"/>
-            <a:ext cx="6858000" cy="4800600"/>
-          </a:xfrm>
-          <a:prstGeom prst="rect">
-            <a:avLst/>
-          </a:prstGeom>
-        </p:spPr>
-        <p:txBody>
-          <a:bodyPr wrap="square"/>
-          <a:lstStyle/>
-          <a:p>
-            <a:r>
-              <a:rPr lang="zh-CN" dirty="0"/>
-              <a:t>第 30 节 · 交互程序的骨架与收尾</a:t>
-            </a:r>
-          </a:p>
-          <a:p>
-            <a:r>
-              <a:rPr lang="zh-CN" dirty="0"/>
-              <a:t>单元 6 · 用户输入与 while 循环 · W6</a:t>
-            </a:r>
-          </a:p>
-          <a:p>
-            <a:r>
-              <a:rPr lang="zh-CN" dirty="0"/>
-              <a:t/>
-            </a:r>
-          </a:p>
-          <a:p>
-            <a:r>
-              <a:rPr lang="zh-CN" dirty="0"/>
-              <a:t>学习目标：能组装出「提示 → 输入 → 校验 → 处理」的完整交互程序</a:t>
-            </a:r>
-          </a:p>
-          <a:p>
-            <a:r>
-              <a:rPr lang="zh-CN" dirty="0"/>
-              <a:t/>
-            </a:r>
-          </a:p>
-          <a:p>
-            <a:r>
-              <a:rPr lang="zh-CN" dirty="0"/>
-              <a:t>课堂实操（40 分钟，不看答案）：</a:t>
-            </a:r>
-          </a:p>
-          <a:p>
-            <a:r>
-              <a:rPr lang="zh-CN" dirty="0"/>
-              <a:t>· 现场把 input + int + if + while 组装成一个完整程序</a:t>
-            </a:r>
-          </a:p>
-          <a:p>
-            <a:r>
-              <a:rPr lang="zh-CN" dirty="0"/>
-              <a:t/>
-            </a:r>
-          </a:p>
-          <a:p>
-            <a:r>
-              <a:rPr lang="zh-CN" dirty="0"/>
-              <a:t>课后作业：</a:t>
-            </a:r>
-          </a:p>
-          <a:p>
-            <a:r>
-              <a:rPr lang="zh-CN" dirty="0"/>
-              <a:t>· ★ 动手项目 7.5–7.9 投票统计 + 7.10 收银机</a:t>
-            </a:r>
-          </a:p>
-          <a:p>
-            <a:r>
-              <a:rPr lang="zh-CN" dirty="0"/>
-              <a:t/>
-            </a:r>
-          </a:p>
-          <a:p>
-            <a:r>
-              <a:rPr lang="zh-CN" dirty="0"/>
-              <a:t>节奏：讲 20 分钟 → 学员自己敲 40 分钟（不看答案）→ 对讲评自查 20 分钟 → 写作业 10 分钟。</a:t>
-            </a:r>
-          </a:p>
-        </p:txBody>
-      </p:sp>
-    </p:spTree>
-  </p:cSld>
-  <p:clrMapOvr>
-    <a:masterClrMapping/>
-  </p:clrMapOvr>
-</p:notes>
-</file>
-
-<file path=ppt/notesSlides/notesSlide7.xml><?xml version="1.0" encoding="utf-8"?>
-<p:notes xmlns:a="http://schemas.openxmlformats.org/drawingml/2006/main" xmlns:p="http://schemas.openxmlformats.org/presentationml/2006/main" xmlns:r="http://schemas.openxmlformats.org/officeDocument/2006/relationships">
-  <p:cSld>
-    <p:spTree>
-      <p:nvGrpSpPr>
-        <p:cNvPr id="1" name=""/>
-        <p:cNvGrpSpPr/>
-        <p:nvPr/>
-      </p:nvGrpSpPr>
-      <p:grpSpPr>
-        <a:xfrm>
-          <a:off x="0" y="0"/>
-          <a:ext cx="0" cy="0"/>
-          <a:chOff x="0" y="0"/>
-          <a:chExt cx="0" cy="0"/>
-        </a:xfrm>
-      </p:grpSpPr>
-      <p:sp>
-        <p:nvSpPr>
-          <p:cNvPr id="2" name="讲课提示"/>
-          <p:cNvSpPr txBox="1"/>
-          <p:nvPr/>
-        </p:nvSpPr>
-        <p:spPr>
-          <a:xfrm>
-            <a:off x="457200" y="457200"/>
-            <a:ext cx="6858000" cy="4800600"/>
-          </a:xfrm>
-          <a:prstGeom prst="rect">
-            <a:avLst/>
-          </a:prstGeom>
-        </p:spPr>
-        <p:txBody>
-          <a:bodyPr wrap="square"/>
-          <a:lstStyle/>
-          <a:p>
-            <a:r>
-              <a:rPr lang="zh-CN" dirty="0"/>
-              <a:t>第 30 节 · 核心知识点：交互程序的骨架与收尾</a:t>
-            </a:r>
-          </a:p>
-          <a:p>
-            <a:r>
-              <a:rPr lang="zh-CN" dirty="0"/>
-              <a:t/>
-            </a:r>
-          </a:p>
-          <a:p>
-            <a:r>
-              <a:rPr lang="zh-CN" dirty="0"/>
-              <a:t>讲这一页时：先让学生说出上节课的结论，再逐块讲要点。</a:t>
-            </a:r>
-          </a:p>
-          <a:p>
-            <a:r>
-              <a:rPr lang="zh-CN" dirty="0"/>
-              <a:t>每讲完一块，问一句「这一步如果写错了，报错会长什么样？」——把错误提前讲。</a:t>
-            </a:r>
-          </a:p>
-          <a:p>
-            <a:r>
-              <a:rPr lang="zh-CN" dirty="0"/>
-              <a:t/>
-            </a:r>
-          </a:p>
-          <a:p>
-            <a:r>
-              <a:rPr lang="zh-CN" dirty="0"/>
-              <a:t>本节目标：能组装出「提示 → 输入 → 校验 → 处理」的完整交互程序</a:t>
-            </a:r>
-          </a:p>
-          <a:p>
-            <a:r>
-              <a:rPr lang="zh-CN" dirty="0"/>
-              <a:t/>
-            </a:r>
-          </a:p>
-          <a:p>
-            <a:r>
-              <a:rPr lang="zh-CN" dirty="0"/>
-              <a:t>看不到懂的地方，回讲义对应小节读一遍，再回来对着这页复述一次——能讲出来才算真懂。</a:t>
-            </a:r>
-          </a:p>
-        </p:txBody>
-      </p:sp>
-    </p:spTree>
-  </p:cSld>
-  <p:clrMapOvr>
-    <a:masterClrMapping/>
-  </p:clrMapOvr>
-</p:notes>
-</file>
-
-<file path=ppt/notesSlides/notesSlide8.xml><?xml version="1.0" encoding="utf-8"?>
-<p:notes xmlns:a="http://schemas.openxmlformats.org/drawingml/2006/main" xmlns:p="http://schemas.openxmlformats.org/presentationml/2006/main" xmlns:r="http://schemas.openxmlformats.org/officeDocument/2006/relationships">
-  <p:cSld>
-    <p:spTree>
-      <p:nvGrpSpPr>
-        <p:cNvPr id="1" name=""/>
-        <p:cNvGrpSpPr/>
-        <p:nvPr/>
-      </p:nvGrpSpPr>
-      <p:grpSpPr>
-        <a:xfrm>
-          <a:off x="0" y="0"/>
-          <a:ext cx="0" cy="0"/>
-          <a:chOff x="0" y="0"/>
-          <a:chExt cx="0" cy="0"/>
-        </a:xfrm>
-      </p:grpSpPr>
-      <p:sp>
-        <p:nvSpPr>
-          <p:cNvPr id="2" name="讲课提示"/>
-          <p:cNvSpPr txBox="1"/>
-          <p:nvPr/>
-        </p:nvSpPr>
-        <p:spPr>
-          <a:xfrm>
-            <a:off x="457200" y="457200"/>
-            <a:ext cx="6858000" cy="4800600"/>
-          </a:xfrm>
-          <a:prstGeom prst="rect">
-            <a:avLst/>
-          </a:prstGeom>
-        </p:spPr>
-        <p:txBody>
-          <a:bodyPr wrap="square"/>
-          <a:lstStyle/>
-          <a:p>
-            <a:r>
-              <a:rPr lang="zh-CN" dirty="0"/>
-              <a:t>第 31 节 · 动手实战与答案讲评</a:t>
-            </a:r>
-          </a:p>
-          <a:p>
-            <a:r>
-              <a:rPr lang="zh-CN" dirty="0"/>
-              <a:t>单元 6 · 用户输入与 while 循环 · W6</a:t>
-            </a:r>
-          </a:p>
-          <a:p>
-            <a:r>
-              <a:rPr lang="zh-CN" dirty="0"/>
-              <a:t/>
-            </a:r>
-          </a:p>
-          <a:p>
-            <a:r>
-              <a:rPr lang="zh-CN" dirty="0"/>
-              <a:t>学习目标：独立完成单元 6 练习，能写带校验的交互循环</a:t>
-            </a:r>
-          </a:p>
-          <a:p>
-            <a:r>
-              <a:rPr lang="zh-CN" dirty="0"/>
-              <a:t/>
-            </a:r>
-          </a:p>
-          <a:p>
-            <a:r>
-              <a:rPr lang="zh-CN" dirty="0"/>
-              <a:t>课堂实操（40 分钟，不看答案）：</a:t>
-            </a:r>
-          </a:p>
-          <a:p>
-            <a:r>
-              <a:rPr lang="zh-CN" dirty="0"/>
-              <a:t>· 限时 30 分钟独立完成基础档</a:t>
-            </a:r>
-          </a:p>
-          <a:p>
-            <a:r>
-              <a:rPr lang="zh-CN" dirty="0"/>
-              <a:t>· 逐题对照答案讲评</a:t>
-            </a:r>
-          </a:p>
-          <a:p>
-            <a:r>
-              <a:rPr lang="zh-CN" dirty="0"/>
-              <a:t/>
-            </a:r>
-          </a:p>
-          <a:p>
-            <a:r>
-              <a:rPr lang="zh-CN" dirty="0"/>
-              <a:t>课后作业：</a:t>
-            </a:r>
-          </a:p>
-          <a:p>
-            <a:r>
-              <a:rPr lang="zh-CN" dirty="0"/>
-              <a:t>· 产出：带输入校验的投票统计</a:t>
-            </a:r>
-          </a:p>
-          <a:p>
-            <a:r>
-              <a:rPr lang="zh-CN" dirty="0"/>
-              <a:t/>
-            </a:r>
-          </a:p>
-          <a:p>
-            <a:r>
-              <a:rPr lang="zh-CN" dirty="0"/>
-              <a:t>节奏：讲 20 分钟 → 学员自己敲 40 分钟（不看答案）→ 对讲评自查 20 分钟 → 写作业 10 分钟。</a:t>
-            </a:r>
-          </a:p>
-        </p:txBody>
-      </p:sp>
-    </p:spTree>
-  </p:cSld>
-  <p:clrMapOvr>
-    <a:masterClrMapping/>
-  </p:clrMapOvr>
-</p:notes>
-</file>
-
-<file path=ppt/notesSlides/notesSlide9.xml><?xml version="1.0" encoding="utf-8"?>
-<p:notes xmlns:a="http://schemas.openxmlformats.org/drawingml/2006/main" xmlns:p="http://schemas.openxmlformats.org/presentationml/2006/main" xmlns:r="http://schemas.openxmlformats.org/officeDocument/2006/relationships">
-  <p:cSld>
-    <p:spTree>
-      <p:nvGrpSpPr>
-        <p:cNvPr id="1" name=""/>
-        <p:cNvGrpSpPr/>
-        <p:nvPr/>
-      </p:nvGrpSpPr>
-      <p:grpSpPr>
-        <a:xfrm>
-          <a:off x="0" y="0"/>
-          <a:ext cx="0" cy="0"/>
-          <a:chOff x="0" y="0"/>
-          <a:chExt cx="0" cy="0"/>
-        </a:xfrm>
-      </p:grpSpPr>
-      <p:sp>
-        <p:nvSpPr>
-          <p:cNvPr id="2" name="讲课提示"/>
-          <p:cNvSpPr txBox="1"/>
-          <p:nvPr/>
-        </p:nvSpPr>
-        <p:spPr>
-          <a:xfrm>
-            <a:off x="457200" y="457200"/>
-            <a:ext cx="6858000" cy="4800600"/>
-          </a:xfrm>
-          <a:prstGeom prst="rect">
-            <a:avLst/>
-          </a:prstGeom>
-        </p:spPr>
-        <p:txBody>
-          <a:bodyPr wrap="square"/>
-          <a:lstStyle/>
-          <a:p>
-            <a:r>
-              <a:rPr lang="zh-CN" dirty="0"/>
-              <a:t>第 31 节 · 核心知识点：动手实战与答案讲评</a:t>
-            </a:r>
-          </a:p>
-          <a:p>
-            <a:r>
-              <a:rPr lang="zh-CN" dirty="0"/>
-              <a:t/>
-            </a:r>
-          </a:p>
-          <a:p>
-            <a:r>
-              <a:rPr lang="zh-CN" dirty="0"/>
-              <a:t>讲这一页时：先让学生说出上节课的结论，再逐块讲要点。</a:t>
-            </a:r>
-          </a:p>
-          <a:p>
-            <a:r>
-              <a:rPr lang="zh-CN" dirty="0"/>
-              <a:t>每讲完一块，问一句「这一步如果写错了，报错会长什么样？」——把错误提前讲。</a:t>
-            </a:r>
-          </a:p>
-          <a:p>
-            <a:r>
-              <a:rPr lang="zh-CN" dirty="0"/>
-              <a:t/>
-            </a:r>
-          </a:p>
-          <a:p>
-            <a:r>
-              <a:rPr lang="zh-CN" dirty="0"/>
-              <a:t>本节目标：独立完成单元 6 练习，能写带校验的交互循环</a:t>
-            </a:r>
-          </a:p>
-          <a:p>
-            <a:r>
-              <a:rPr lang="zh-CN" dirty="0"/>
-              <a:t/>
-            </a:r>
-          </a:p>
-          <a:p>
-            <a:r>
-              <a:rPr lang="zh-CN" dirty="0"/>
-              <a:t>看不到懂的地方，回讲义对应小节读一遍，再回来对着这页复述一次——能讲出来才算真懂。</a:t>
-            </a:r>
-          </a:p>
-        </p:txBody>
-      </p:sp>
-    </p:spTree>
-  </p:cSld>
-  <p:clrMapOvr>
-    <a:masterClrMapping/>
-  </p:clrMapOvr>
-</p:notes>
 </file>
 
 <file path=ppt/slideLayouts/slideLayout1.xml><?xml version="1.0" encoding="utf-8"?>

--- a/python-course-ppt/逐节课件/Python讲授课件-单元06.pptx
+++ b/python-course-ppt/逐节课件/Python讲授课件-单元06.pptx
@@ -2200,7 +2200,7 @@
   <p:cSld>
     <p:spTree>
       <p:nvGrpSpPr>
-        <p:cNvPr id="42" name="" descr="&lt;Slide style={{ width: '1280px', height: '720px', backgroundColor: '#FAFCFE', padding: 0, position: 'relative', overflow: 'hidden' }}&gt;&#13;&#10;    &lt;Box style={{ position: 'absolute', left: 64, top: 36, width: '1152px', flexDirection: 'row', alignItems: 'center', gap: 12 }}&gt;&#13;&#10;        &lt;Box style={{ background: '#0E9B78', borderRadius: 5, padding: '3px 11px' }}&gt;&#13;&#10;            &lt;Text style={{ fontSize: 14, fontWeight: 'bold', color: '#FFFFFF' }}&gt;第 28 节&lt;/Text&gt;&#13;&#10;        &lt;/Box&gt;&#13;&#10;        &lt;Text style={{ fontSize: 30, fontWeight: 'bold', color: '#16232E' }}&gt;核心知识点&lt;/Text&gt;&#13;&#10;        &lt;Text style={{ fontSize: 15, color: '#5A6B7A', marginTop: 10 }}&gt;· input() 的铁律与 for/whil…&lt;/Text&gt;&#13;&#10;    &lt;/Box&gt;&#13;&#10;    &lt;Box style={{ position: 'absolute', left: 0, top: 0, width: '1280px', height: '720px' }}&gt;&#13;&#10;        &lt;svg width='1280' height='720' viewBox='0 0 1280 720'&gt;&#13;&#10;            &lt;rect x='64' y='96' width='548' height='330' rx='12' fill='#FFFFFF' stroke='#D8E3EE' /&gt;&lt;rect x='64' y='96' width='548' height='4' rx='2' fill='#1F5FA8' /&gt;&lt;text x='82' y='130' fontSize='15.5' fontWeight='bold' fill='#1F5FA8' textAnchor='start' fontFamily='Microsoft YaHei'&gt;2.1 input() 的铁律：拿回来的永远是字符串&lt;/text&gt;&lt;text x='82' y='169.0' fontSize='13' fill='#3A4A58' textAnchor='start' fontFamily='Microsoft YaHei'&gt;· 标准三步模板：&lt;/text&gt;&lt;rect x='668' y='96' width='548' height='330' rx='12' fill='#FFFFFF' stroke='#D8E3EE' /&gt;&lt;rect x='668' y='96' width='548' height='4' rx='2' fill='#1F5FA8' /&gt;&lt;text x='686' y='130' fontSize='15.5' fontWeight='bold' fill='#1F5FA8' textAnchor='start' fontFamily='Microsoft YaHei'&gt;2.2 for 还是 while：怎么选&lt;/text&gt;&lt;text x='686' y='169.0' fontSize='13' fill='#3A4A58' textAnchor='start' fontFamily='Microsoft YaHei'&gt;· for 像按清单点名——名单上有 10 个人，念完 10 个就结束。&lt;/text&gt;&lt;text x='686' y='197.5' fontSize='13' fill='#3A4A58' textAnchor='start' fontFamily='Microsoft YaHei'&gt;· while 像守门等人——你说&quot;他来了我就开门&quot;，所以得一直站着等，来几个人都不确定&lt;/text&gt;&lt;text x='686' y='217.0' fontSize='13' fill='#3A4A58' textAnchor='start' fontFamily='Microsoft YaHei'&gt;。&lt;/text&gt;&lt;rect x='64' y='574' width='1152' height='66' rx='12' fill='#EEF5FB' /&gt;&lt;text x='84' y='616' fontSize='14' fill='#243444' textAnchor='start' fontFamily='Microsoft YaHei'&gt;看不懂的地方先回讲义对应小节读一遍，再回来对着这页复述一次——能讲出来才算真懂。&lt;/text&gt;&#13;&#10;            &lt;text x='64' y='684' fontSize='13' fill='#8A9AAA' fontFamily='Microsoft YaHei'&gt;Python 讲授课件 · 逐节版&lt;/text&gt;&#13;&#10;            &lt;text x='1216' y='684' fontSize='13' fill='#8A9AAA' textAnchor='end' fontFamily='Microsoft YaHei'&gt;单元 6 · 第 28 节&lt;/text&gt;&#13;&#10;        &lt;/svg&gt;&#13;&#10;    &lt;/Box&gt;&#13;&#10;&lt;/Slide&gt;&#13;&#10;"/>
+        <p:cNvPr id="42" name="" descr="&lt;Slide style={{ width: '1280px', height: '720px', backgroundColor: '#FAFCFE', padding: 0, position: 'relative', overflow: 'hidden' }}&gt;&#13;&#10;    &lt;Box style={{ position: 'absolute', left: 64, top: 36, width: '1152px', flexDirection: 'row', alignItems: 'center', gap: 12 }}&gt;&#13;&#10;        &lt;Box style={{ background: '#0E9B78', borderRadius: 5, padding: '3px 11px' }}&gt;&#13;&#10;            &lt;Text style={{ fontSize: 14, fontWeight: 'bold', color: '#FFFFFF' }}&gt;第 28 节&lt;/Text&gt;&#13;&#10;        &lt;/Box&gt;&#13;&#10;        &lt;Text style={{ fontSize: 30, fontWeight: 'bold', color: '#16232E' }}&gt;核心知识点&lt;/Text&gt;&#13;&#10;        &lt;Text style={{ fontSize: 15, color: '#5A6B7A', marginTop: 10 }}&gt;· input() 的铁律与 for/whil…&lt;/Text&gt;&#13;&#10;    &lt;/Box&gt;&#13;&#10;    &lt;Box style={{ position: 'absolute', left: 0, top: 0, width: '1280px', height: '720px' }}&gt;&#13;&#10;        &lt;svg width='1280' height='720' viewBox='0 0 1280 720'&gt;&#13;&#10;            &lt;rect x='64' y='96' width='548' height='330' rx='12' fill='#FFFFFF' stroke='#D8E3EE' /&gt;&lt;rect x='64' y='96' width='548' height='4' rx='2' fill='#1F5FA8' /&gt;&lt;text x='82' y='130' fontSize='15.5' fontWeight='bold' fill='#1F5FA8' textAnchor='start' fontFamily='Microsoft YaHei'&gt;2.1 input() 的铁律：拿回来的永远是字符串&lt;/text&gt;&lt;text x='82' y='169.0' fontSize='13' fill='#3A4A58' textAnchor='start' fontFamily='Microsoft YaHei'&gt;· 标准三步模板&lt;/text&gt;&lt;rect x='668' y='96' width='548' height='330' rx='12' fill='#FFFFFF' stroke='#D8E3EE' /&gt;&lt;rect x='668' y='96' width='548' height='4' rx='2' fill='#1F5FA8' /&gt;&lt;text x='686' y='130' fontSize='15.5' fontWeight='bold' fill='#1F5FA8' textAnchor='start' fontFamily='Microsoft YaHei'&gt;2.2 for 还是 while：怎么选&lt;/text&gt;&lt;text x='686' y='169.0' fontSize='13' fill='#3A4A58' textAnchor='start' fontFamily='Microsoft YaHei'&gt;· for 像按清单点名——名单上有 10 个人，念完 10 个就结束。&lt;/text&gt;&lt;text x='686' y='197.5' fontSize='13' fill='#3A4A58' textAnchor='start' fontFamily='Microsoft YaHei'&gt;· while 像守门等人——你说&quot;他来了我就开门&quot;，所以得一直站着等，&lt;/text&gt;&lt;text x='686' y='217.0' fontSize='13' fill='#3A4A58' textAnchor='start' fontFamily='Microsoft YaHei'&gt;来几个人都不确定。&lt;/text&gt;&lt;rect x='64' y='574' width='1152' height='66' rx='12' fill='#EEF5FB' /&gt;&lt;text x='84' y='616' fontSize='14' fill='#243444' textAnchor='start' fontFamily='Microsoft YaHei'&gt;看不懂的地方先回讲义对应小节读一遍，再回来对着这页复述一次——能讲出来才算真懂。&lt;/text&gt;&#13;&#10;            &lt;text x='64' y='684' fontSize='13' fill='#8A9AAA' fontFamily='Microsoft YaHei'&gt;Python 讲授课件 · 逐节版&lt;/text&gt;&#13;&#10;            &lt;text x='1216' y='684' fontSize='13' fill='#8A9AAA' textAnchor='end' fontFamily='Microsoft YaHei'&gt;单元 6 · 第 28 节&lt;/text&gt;&#13;&#10;        &lt;/svg&gt;&#13;&#10;    &lt;/Box&gt;&#13;&#10;&lt;/Slide&gt;&#13;&#10;"/>
         <p:cNvGrpSpPr/>
         <p:nvPr/>
       </p:nvGrpSpPr>
@@ -3062,7 +3062,7 @@
   <p:cSld>
     <p:spTree>
       <p:nvGrpSpPr>
-        <p:cNvPr id="68" name="" descr="&lt;Slide style={{ width: '1280px', height: '720px', backgroundColor: '#FAFCFE', padding: 0, position: 'relative', overflow: 'hidden' }}&gt;&#13;&#10;    &lt;Box style={{ position: 'absolute', left: 64, top: 36, width: '1152px', flexDirection: 'row', alignItems: 'center', gap: 12 }}&gt;&#13;&#10;        &lt;Box style={{ background: '#0E9B78', borderRadius: 5, padding: '3px 11px' }}&gt;&#13;&#10;            &lt;Text style={{ fontSize: 14, fontWeight: 'bold', color: '#FFFFFF' }}&gt;第 30 节&lt;/Text&gt;&#13;&#10;        &lt;/Box&gt;&#13;&#10;        &lt;Text style={{ fontSize: 30, fontWeight: 'bold', color: '#16232E' }}&gt;核心知识点&lt;/Text&gt;&#13;&#10;        &lt;Text style={{ fontSize: 15, color: '#5A6B7A', marginTop: 10 }}&gt;· 交互程序的骨架与收尾&lt;/Text&gt;&#13;&#10;    &lt;/Box&gt;&#13;&#10;    &lt;Box style={{ position: 'absolute', left: 0, top: 0, width: '1280px', height: '720px' }}&gt;&#13;&#10;        &lt;svg width='1280' height='720' viewBox='0 0 1280 720'&gt;&#13;&#10;            &lt;rect x='64' y='96' width='548' height='330' rx='12' fill='#FFFFFF' stroke='#D8E3EE' /&gt;&lt;rect x='64' y='96' width='548' height='4' rx='2' fill='#1F5FA8' /&gt;&lt;text x='82' y='130' fontSize='15.5' fontWeight='bold' fill='#1F5FA8' textAnchor='start' fontFamily='Microsoft YaHei'&gt;2.5 while ... else：循环&quot;没被打断&quot;时执行&lt;/text&gt;&lt;text x='82' y='169.0' fontSize='13' fill='#3A4A58' textAnchor='start' fontFamily='Microsoft YaHei'&gt;· 这是一个非常优雅但很少人用、却极其好用的结构：&lt;/text&gt;&lt;rect x='668' y='96' width='548' height='330' rx='12' fill='#FFFFFF' stroke='#D8E3EE' /&gt;&lt;rect x='668' y='96' width='548' height='4' rx='2' fill='#1F5FA8' /&gt;&lt;text x='686' y='130' fontSize='15.5' fontWeight='bold' fill='#1F5FA8' textAnchor='start' fontFamily='Microsoft YaHei'&gt;2.6 交互程序的骨架&lt;/text&gt;&lt;text x='686' y='169.0' fontSize='13' fill='#3A4A58' textAnchor='start' fontFamily='Microsoft YaHei'&gt;· 注意这个模式的关键点：&lt;/text&gt;&lt;text x='686' y='197.5' fontSize='13' fill='#3A4A58' textAnchor='start' fontFamily='Microsoft YaHei'&gt;· while True 本身没有出口，唯一的出口是 break。&lt;/text&gt;&lt;text x='686' y='226.0' fontSize='13' fill='#3A4A58' textAnchor='start' fontFamily='Microsoft YaHei'&gt;· 所以每一条通向&quot;用户想退出&quot;的路径，都必须有 break。&lt;/text&gt;&lt;text x='64' y='470' fontSize='14.5' fontWeight='bold' fill='#0E9B78' textAnchor='start' fontFamily='Microsoft YaHei'&gt;本节的代码示例&lt;/text&gt;&lt;text x='64' y='500' fontSize='13' fill='#3A4A58' textAnchor='start' fontFamily='Microsoft YaHei'&gt;· input 的类型陷阱与三步模板&lt;/text&gt;&lt;text x='468' y='500' fontSize='13' fill='#3A4A58' textAnchor='start' fontFamily='Microsoft YaHei'&gt;· while 基本循环&lt;/text&gt;&lt;text x='872' y='500' fontSize='13' fill='#3A4A58' textAnchor='start' fontFamily='Microsoft YaHei'&gt;· break 与 continue&lt;/text&gt;&lt;rect x='64' y='574' width='1152' height='66' rx='12' fill='#EEF5FB' /&gt;&lt;text x='84' y='616' fontSize='14' fill='#243444' textAnchor='start' fontFamily='Microsoft YaHei'&gt;看不懂的地方先回讲义对应小节读一遍，再回来对着这页复述一次——能讲出来才算真懂。&lt;/text&gt;&#13;&#10;            &lt;text x='64' y='684' fontSize='13' fill='#8A9AAA' fontFamily='Microsoft YaHei'&gt;Python 讲授课件 · 逐节版&lt;/text&gt;&#13;&#10;            &lt;text x='1216' y='684' fontSize='13' fill='#8A9AAA' textAnchor='end' fontFamily='Microsoft YaHei'&gt;单元 6 · 第 30 节&lt;/text&gt;&#13;&#10;        &lt;/svg&gt;&#13;&#10;    &lt;/Box&gt;&#13;&#10;&lt;/Slide&gt;&#13;&#10;"/>
+        <p:cNvPr id="68" name="" descr="&lt;Slide style={{ width: '1280px', height: '720px', backgroundColor: '#FAFCFE', padding: 0, position: 'relative', overflow: 'hidden' }}&gt;&#13;&#10;    &lt;Box style={{ position: 'absolute', left: 64, top: 36, width: '1152px', flexDirection: 'row', alignItems: 'center', gap: 12 }}&gt;&#13;&#10;        &lt;Box style={{ background: '#0E9B78', borderRadius: 5, padding: '3px 11px' }}&gt;&#13;&#10;            &lt;Text style={{ fontSize: 14, fontWeight: 'bold', color: '#FFFFFF' }}&gt;第 30 节&lt;/Text&gt;&#13;&#10;        &lt;/Box&gt;&#13;&#10;        &lt;Text style={{ fontSize: 30, fontWeight: 'bold', color: '#16232E' }}&gt;核心知识点&lt;/Text&gt;&#13;&#10;        &lt;Text style={{ fontSize: 15, color: '#5A6B7A', marginTop: 10 }}&gt;· 交互程序的骨架与收尾&lt;/Text&gt;&#13;&#10;    &lt;/Box&gt;&#13;&#10;    &lt;Box style={{ position: 'absolute', left: 0, top: 0, width: '1280px', height: '720px' }}&gt;&#13;&#10;        &lt;svg width='1280' height='720' viewBox='0 0 1280 720'&gt;&#13;&#10;            &lt;rect x='64' y='96' width='368' height='330' rx='12' fill='#FFFFFF' stroke='#D8E3EE' /&gt;&lt;rect x='64' y='96' width='368' height='4' rx='2' fill='#1F5FA8' /&gt;&lt;text x='82' y='130' fontSize='15.5' fontWeight='bold' fill='#1F5FA8' textAnchor='start' fontFamily='Microsoft YaHei'&gt;2.5 while ... else：&lt;/text&gt;&lt;text x='82' y='153' fontSize='15.5' fontWeight='bold' fill='#1F5FA8' textAnchor='start' fontFamily='Microsoft YaHei'&gt;循环&quot;没被打断&quot;时执行&lt;/text&gt;&lt;text x='82' y='192.0' fontSize='13' fill='#3A4A58' textAnchor='start' fontFamily='Microsoft YaHei'&gt;· 这是一个非常优雅但很少人用、却极其好用的结构：&lt;/text&gt;&lt;rect x='468' y='96' width='368' height='330' rx='12' fill='#FFFFFF' stroke='#D8E3EE' /&gt;&lt;rect x='468' y='96' width='368' height='4' rx='2' fill='#1F5FA8' /&gt;&lt;text x='486' y='130' fontSize='15.5' fontWeight='bold' fill='#1F5FA8' textAnchor='start' fontFamily='Microsoft YaHei'&gt;2.6 交互程序的骨架&lt;/text&gt;&lt;text x='486' y='169.0' fontSize='13' fill='#3A4A58' textAnchor='start' fontFamily='Microsoft YaHei'&gt;· 注意这个模式的关键点&lt;/text&gt;&lt;text x='486' y='197.5' fontSize='13' fill='#3A4A58' textAnchor='start' fontFamily='Microsoft YaHei'&gt;· while True 本身没有出口，唯一的出口是 break。&lt;/text&gt;&lt;text x='486' y='226.0' fontSize='13' fill='#3A4A58' textAnchor='start' fontFamily='Microsoft YaHei'&gt;· 所以每一条通向&quot;用户想退出&quot;的路径，都必须有&lt;/text&gt;&lt;text x='486' y='245.5' fontSize='13' fill='#3A4A58' textAnchor='start' fontFamily='Microsoft YaHei'&gt;break。&lt;/text&gt;&lt;rect x='872' y='96' width='368' height='330' rx='12' fill='#FFFFFF' stroke='#D8E3EE' /&gt;&lt;rect x='872' y='96' width='368' height='4' rx='2' fill='#1F5FA8' /&gt;&lt;text x='890' y='130' fontSize='15.5' fontWeight='bold' fill='#1F5FA8' textAnchor='start' fontFamily='Microsoft YaHei'&gt;2.7 用 while 处理列表和字典（教材 7.3）&lt;/text&gt;&lt;text x='890' y='169.0' fontSize='13' fill='#3A4A58' textAnchor='start' fontFamily='Microsoft YaHei'&gt;· ① 在列表之间搬元素。&lt;/text&gt;&lt;text x='890' y='197.5' fontSize='13' fill='#3A4A58' textAnchor='start' fontFamily='Microsoft YaHei'&gt;· ② 删除所有等于某值的元素。&lt;/text&gt;&lt;text x='890' y='226.0' fontSize='13' fill='#3A4A58' textAnchor='start' fontFamily='Microsoft YaHei'&gt;· ③ 用用户输入来填充字典。&lt;/text&gt;&lt;text x='64' y='470' fontSize='14.5' fontWeight='bold' fill='#0E9B78' textAnchor='start' fontFamily='Microsoft YaHei'&gt;本节的代码示例&lt;/text&gt;&lt;text x='64' y='500' fontSize='13' fill='#3A4A58' textAnchor='start' fontFamily='Microsoft YaHei'&gt;· input 的类型陷阱与三步模板&lt;/text&gt;&lt;text x='468' y='500' fontSize='13' fill='#3A4A58' textAnchor='start' fontFamily='Microsoft YaHei'&gt;· while 基本循环&lt;/text&gt;&lt;text x='872' y='500' fontSize='13' fill='#3A4A58' textAnchor='start' fontFamily='Microsoft YaHei'&gt;· break 与 continue&lt;/text&gt;&lt;rect x='64' y='574' width='1152' height='66' rx='12' fill='#EEF5FB' /&gt;&lt;text x='84' y='616' fontSize='14' fill='#243444' textAnchor='start' fontFamily='Microsoft YaHei'&gt;看不懂的地方先回讲义对应小节读一遍，再回来对着这页复述一次——能讲出来才算真懂。&lt;/text&gt;&#13;&#10;            &lt;text x='64' y='684' fontSize='13' fill='#8A9AAA' fontFamily='Microsoft YaHei'&gt;Python 讲授课件 · 逐节版&lt;/text&gt;&#13;&#10;            &lt;text x='1216' y='684' fontSize='13' fill='#8A9AAA' textAnchor='end' fontFamily='Microsoft YaHei'&gt;单元 6 · 第 30 节&lt;/text&gt;&#13;&#10;        &lt;/svg&gt;&#13;&#10;    &lt;/Box&gt;&#13;&#10;&lt;/Slide&gt;&#13;&#10;"/>
         <p:cNvGrpSpPr/>
         <p:nvPr/>
       </p:nvGrpSpPr>

--- a/python-course-ppt/逐节课件/Python讲授课件-单元06.pptx
+++ b/python-course-ppt/逐节课件/Python讲授课件-单元06.pptx
@@ -555,7 +555,7 @@
   <p:cSld>
     <p:spTree>
       <p:nvGrpSpPr>
-        <p:cNvPr id="1" name="" descr="&lt;Slide style={{ width: '1280px', height: '720px', backgroundColor: '#FAFCFE', padding: 0, position: 'relative', overflow: 'hidden' }}&gt;&#13;&#10;    &lt;Box style={{ position: 'absolute', left: 0, top: 0, width: '1280px', height: '150px', background: '#1F5FA8' }} /&gt;&#13;&#10;    &lt;Box style={{ position: 'absolute', left: 64, top: 34, width: '1152px', flexDirection: 'column' }}&gt;&#13;&#10;        &lt;Text style={{ fontSize: 15, fontWeight: 'bold', color: '#BFD9F2', letterSpacing: 2 }}&gt;阶段 1 · 单元 6&lt;/Text&gt;&#13;&#10;        &lt;Text style={{ fontSize: 38, fontWeight: 'bold', color: '#FFFFFF', marginTop: 6 }}&gt;用户输入与 while 循环&lt;/Text&gt;&#13;&#10;    &lt;/Box&gt;&#13;&#10;    &lt;Box style={{ position: 'absolute', left: 64, top: 168, width: '1152px', height: 470 }}&gt;&#13;&#10;        &lt;svg width='1152' height='470' viewBox='0 0 1152 470'&gt;&#13;&#10;            &lt;text x='0' y='18' fontSize='15' fontWeight='bold' fill='#16232E' fontFamily='Microsoft YaHei'&gt;本单元共 5 节课&lt;/text&gt;&#13;&#10;            &lt;rect x='0' y='196' width='1152' height='38' rx='7' fill='#FFFFFF' /&gt;&lt;text x='16' y='221' fontSize='15' fontWeight='bold' fill='#1F5FA8' fontFamily='Microsoft YaHei'&gt;第 28 节&lt;/text&gt;&lt;text x='96' y='221' fontSize='15' fill='#16232E' fontFamily='Microsoft YaHei'&gt;input() 的铁律与 for/while 之争&lt;/text&gt;&lt;text x='1080' y='221' fontSize='13' fill='#5A6B7A' textAnchor='end' fontFamily='Microsoft YaHei'&gt;W6&lt;/text&gt;&lt;rect x='0' y='238' width='1152' height='38' rx='7' fill='#F2F7FD' /&gt;&lt;text x='16' y='263' fontSize='15' fontWeight='bold' fill='#1F5FA8' fontFamily='Microsoft YaHei'&gt;第 29 节&lt;/text&gt;&lt;text x='96' y='263' fontSize='15' fill='#16232E' fontFamily='Microsoft YaHei'&gt;break / continue / while-else&lt;/text&gt;&lt;text x='1080' y='263' fontSize='13' fill='#5A6B7A' textAnchor='end' fontFamily='Microsoft YaHei'&gt;W6&lt;/text&gt;&lt;rect x='0' y='280' width='1152' height='38' rx='7' fill='#FFFFFF' /&gt;&lt;text x='16' y='305' fontSize='15' fontWeight='bold' fill='#1F5FA8' fontFamily='Microsoft YaHei'&gt;第 30 节&lt;/text&gt;&lt;text x='96' y='305' fontSize='15' fill='#16232E' fontFamily='Microsoft YaHei'&gt;交互程序的骨架与收尾&lt;/text&gt;&lt;text x='1080' y='305' fontSize='13' fill='#5A6B7A' textAnchor='end' fontFamily='Microsoft YaHei'&gt;W6&lt;/text&gt;&lt;rect x='0' y='322' width='1152' height='38' rx='7' fill='#F2F7FD' /&gt;&lt;text x='16' y='347' fontSize='15' fontWeight='bold' fill='#1F5FA8' fontFamily='Microsoft YaHei'&gt;第 31 节&lt;/text&gt;&lt;text x='96' y='347' fontSize='15' fill='#16232E' fontFamily='Microsoft YaHei'&gt;动手实战与答案讲评&lt;/text&gt;&lt;text x='1080' y='347' fontSize='13' fill='#5A6B7A' textAnchor='end' fontFamily='Microsoft YaHei'&gt;W6&lt;/text&gt;&lt;rect x='0' y='364' width='1152' height='38' rx='7' fill='#FFFFFF' /&gt;&lt;text x='16' y='389' fontSize='15' fontWeight='bold' fill='#1F5FA8' fontFamily='Microsoft YaHei'&gt;第 32 节&lt;/text&gt;&lt;text x='96' y='389' fontSize='15' fill='#16232E' fontFamily='Microsoft YaHei'&gt;单元 6 验收复盘&lt;/text&gt;&lt;text x='1080' y='389' fontSize='13' fill='#5A6B7A' textAnchor='end' fontFamily='Microsoft YaHei'&gt;W6&lt;/text&gt;&#13;&#10;        &lt;/svg&gt;&#13;&#10;    &lt;/Box&gt;&#13;&#10;    &lt;Box style={{ position: 'absolute', left: 64, bottom: 22, width: '1152px', flexDirection: 'row', justifyContent: 'space-between' }}&gt;&#13;&#10;        &lt;Text style={{ fontSize: 13, color: '#8A9AAA' }}&gt;Python 讲授课件 · 逐节版&lt;/Text&gt;&#13;&#10;        &lt;Text style={{ fontSize: 13, color: '#8A9AAA' }}&gt;单元 6 · 封面&lt;/Text&gt;&#13;&#10;    &lt;/Box&gt;&#13;&#10;&lt;/Slide&gt;&#13;&#10;"/>
+        <p:cNvPr id="1" name="" descr="&lt;Slide style={{ width: '1280px', height: '720px', backgroundColor: '#FAFCFE', padding: 0, position: 'relative', overflow: 'hidden' }}&gt;&#13;&#10;    &lt;Box style={{ position: 'absolute', left: 0, top: 0, width: '1280px', height: '150px', background: '#1F5FA8' }} /&gt;&#13;&#10;    &lt;Box style={{ position: 'absolute', left: 64, top: 34, width: '1152px', flexDirection: 'column' }}&gt;&#13;&#10;        &lt;Text style={{ fontSize: 15, fontWeight: 'bold', color: '#BFD9F2', letterSpacing: 2 }}&gt;阶段 1 · 单元 6&lt;/Text&gt;&#13;&#10;        &lt;Text style={{ fontSize: 38, fontWeight: 'bold', color: '#FFFFFF', marginTop: 6 }}&gt;用户输入与 while 循环&lt;/Text&gt;&#13;&#10;    &lt;/Box&gt;&#13;&#10;    &lt;Box style={{ position: 'absolute', left: 64, top: 168, width: '1152px', height: 470 }}&gt;&#13;&#10;        &lt;svg width='1152' height='470' viewBox='0 0 1152 470'&gt;&#13;&#10;            &lt;text x='0' y='18' fontSize='15' fontWeight='bold' fill='#16232E' fontFamily='Microsoft YaHei'&gt;本单元共 5 节课&lt;/text&gt;&#13;&#10;            &lt;rect x='0' y='56.0' width='1152' height='48.0' rx='7' fill='#FFFFFF' /&gt;&lt;text x='16' y='85.0' fontSize='15' fontWeight='bold' fill='#1F5FA8' fontFamily='Microsoft YaHei'&gt;第 28 节&lt;/text&gt;&lt;text x='96' y='85.0' fontSize='15' fill='#16232E' fontFamily='Microsoft YaHei'&gt;input() 的铁律与 for/while 之争&lt;/text&gt;&lt;text x='1080' y='85.0' fontSize='13' fill='#5A6B7A' textAnchor='end' fontFamily='Microsoft YaHei'&gt;W6&lt;/text&gt;&lt;rect x='0' y='135.2' width='1152' height='48.0' rx='7' fill='#F2F7FD' /&gt;&lt;text x='16' y='164.2' fontSize='15' fontWeight='bold' fill='#1F5FA8' fontFamily='Microsoft YaHei'&gt;第 29 节&lt;/text&gt;&lt;text x='96' y='164.2' fontSize='15' fill='#16232E' fontFamily='Microsoft YaHei'&gt;break / continue / while-else&lt;/text&gt;&lt;text x='1080' y='164.2' fontSize='13' fill='#5A6B7A' textAnchor='end' fontFamily='Microsoft YaHei'&gt;W6&lt;/text&gt;&lt;rect x='0' y='214.4' width='1152' height='48.0' rx='7' fill='#FFFFFF' /&gt;&lt;text x='16' y='243.4' fontSize='15' fontWeight='bold' fill='#1F5FA8' fontFamily='Microsoft YaHei'&gt;第 30 节&lt;/text&gt;&lt;text x='96' y='243.4' fontSize='15' fill='#16232E' fontFamily='Microsoft YaHei'&gt;交互程序的骨架与收尾&lt;/text&gt;&lt;text x='1080' y='243.4' fontSize='13' fill='#5A6B7A' textAnchor='end' fontFamily='Microsoft YaHei'&gt;W6&lt;/text&gt;&lt;rect x='0' y='293.6' width='1152' height='48.0' rx='7' fill='#F2F7FD' /&gt;&lt;text x='16' y='322.6' fontSize='15' fontWeight='bold' fill='#1F5FA8' fontFamily='Microsoft YaHei'&gt;第 31 节&lt;/text&gt;&lt;text x='96' y='322.6' fontSize='15' fill='#16232E' fontFamily='Microsoft YaHei'&gt;动手实战与答案讲评&lt;/text&gt;&lt;text x='1080' y='322.6' fontSize='13' fill='#5A6B7A' textAnchor='end' fontFamily='Microsoft YaHei'&gt;W6&lt;/text&gt;&lt;rect x='0' y='372.8' width='1152' height='48.0' rx='7' fill='#FFFFFF' /&gt;&lt;text x='16' y='401.8' fontSize='15' fontWeight='bold' fill='#1F5FA8' fontFamily='Microsoft YaHei'&gt;第 32 节&lt;/text&gt;&lt;text x='96' y='401.8' fontSize='15' fill='#16232E' fontFamily='Microsoft YaHei'&gt;单元 6 验收复盘&lt;/text&gt;&lt;text x='1080' y='401.8' fontSize='13' fill='#5A6B7A' textAnchor='end' fontFamily='Microsoft YaHei'&gt;W6&lt;/text&gt;&#13;&#10;        &lt;/svg&gt;&#13;&#10;    &lt;/Box&gt;&#13;&#10;    &lt;Box style={{ position: 'absolute', left: 64, bottom: 22, width: '1152px', flexDirection: 'row', justifyContent: 'space-between' }}&gt;&#13;&#10;        &lt;Text style={{ fontSize: 13, color: '#8A9AAA' }}&gt;Python 讲授课件 · 逐节版&lt;/Text&gt;&#13;&#10;        &lt;Text style={{ fontSize: 13, color: '#8A9AAA' }}&gt;单元 6 · 封面&lt;/Text&gt;&#13;&#10;    &lt;/Box&gt;&#13;&#10;&lt;/Slide&gt;&#13;&#10;"/>
         <p:cNvGrpSpPr/>
         <p:nvPr/>
       </p:nvGrpSpPr>
@@ -2641,7 +2641,7 @@
   <p:cSld>
     <p:spTree>
       <p:nvGrpSpPr>
-        <p:cNvPr id="55" name="" descr="&lt;Slide style={{ width: '1280px', height: '720px', backgroundColor: '#FAFCFE', padding: 0, position: 'relative', overflow: 'hidden' }}&gt;&#13;&#10;    &lt;Box style={{ position: 'absolute', left: 64, top: 36, width: '1152px', flexDirection: 'row', alignItems: 'center', gap: 12 }}&gt;&#13;&#10;        &lt;Box style={{ background: '#0E9B78', borderRadius: 5, padding: '3px 11px' }}&gt;&#13;&#10;            &lt;Text style={{ fontSize: 14, fontWeight: 'bold', color: '#FFFFFF' }}&gt;第 29 节&lt;/Text&gt;&#13;&#10;        &lt;/Box&gt;&#13;&#10;        &lt;Text style={{ fontSize: 30, fontWeight: 'bold', color: '#16232E' }}&gt;核心知识点&lt;/Text&gt;&#13;&#10;        &lt;Text style={{ fontSize: 15, color: '#5A6B7A', marginTop: 10 }}&gt;· break / continue / wh…&lt;/Text&gt;&#13;&#10;    &lt;/Box&gt;&#13;&#10;    &lt;Box style={{ position: 'absolute', left: 0, top: 0, width: '1280px', height: '720px' }}&gt;&#13;&#10;        &lt;svg width='1280' height='720' viewBox='0 0 1280 720'&gt;&#13;&#10;            &lt;rect x='64' y='96' width='548' height='330' rx='12' fill='#FFFFFF' stroke='#D8E3EE' /&gt;&lt;rect x='64' y='96' width='548' height='4' rx='2' fill='#1F5FA8' /&gt;&lt;text x='82' y='130' fontSize='15.5' fontWeight='bold' fill='#1F5FA8' textAnchor='start' fontFamily='Microsoft YaHei'&gt;2.3 while 的核心：条件先行&lt;/text&gt;&lt;text x='82' y='169.0' fontSize='13' fill='#3A4A58' textAnchor='start' fontFamily='Microsoft YaHei'&gt;· 三个必须记住的点：&lt;/text&gt;&lt;rect x='668' y='96' width='548' height='330' rx='12' fill='#FFFFFF' stroke='#D8E3EE' /&gt;&lt;rect x='668' y='96' width='548' height='4' rx='2' fill='#1F5FA8' /&gt;&lt;text x='686' y='130' fontSize='15.5' fontWeight='bold' fill='#1F5FA8' textAnchor='start' fontFamily='Microsoft YaHei'&gt;2.4 break 与 continue&lt;/text&gt;&lt;text x='686' y='169.0' fontSize='13' fill='#3A4A58' textAnchor='start' fontFamily='Microsoft YaHei'&gt;· break 是&quot;提前下课&quot;——举手表说&quot;这节课剩下的不上了&quot;，直接走人。&lt;/text&gt;&lt;text x='686' y='197.5' fontSize='13' fill='#3A4A58' textAnchor='start' fontFamily='Microsoft YaHei'&gt;· continue 是&quot;这题跳过，下一题&quot;——留在教室里，只是跳过当前这一题。&lt;/text&gt;&lt;rect x='64' y='574' width='1152' height='66' rx='12' fill='#EEF5FB' /&gt;&lt;text x='84' y='616' fontSize='14' fill='#243444' textAnchor='start' fontFamily='Microsoft YaHei'&gt;看不懂的地方先回讲义对应小节读一遍，再回来对着这页复述一次——能讲出来才算真懂。&lt;/text&gt;&#13;&#10;            &lt;text x='64' y='684' fontSize='13' fill='#8A9AAA' fontFamily='Microsoft YaHei'&gt;Python 讲授课件 · 逐节版&lt;/text&gt;&#13;&#10;            &lt;text x='1216' y='684' fontSize='13' fill='#8A9AAA' textAnchor='end' fontFamily='Microsoft YaHei'&gt;单元 6 · 第 29 节&lt;/text&gt;&#13;&#10;        &lt;/svg&gt;&#13;&#10;    &lt;/Box&gt;&#13;&#10;&lt;/Slide&gt;&#13;&#10;"/>
+        <p:cNvPr id="55" name="" descr="&lt;Slide style={{ width: '1280px', height: '720px', backgroundColor: '#FAFCFE', padding: 0, position: 'relative', overflow: 'hidden' }}&gt;&#13;&#10;    &lt;Box style={{ position: 'absolute', left: 64, top: 36, width: '1152px', flexDirection: 'row', alignItems: 'center', gap: 12 }}&gt;&#13;&#10;        &lt;Box style={{ background: '#0E9B78', borderRadius: 5, padding: '3px 11px' }}&gt;&#13;&#10;            &lt;Text style={{ fontSize: 14, fontWeight: 'bold', color: '#FFFFFF' }}&gt;第 29 节&lt;/Text&gt;&#13;&#10;        &lt;/Box&gt;&#13;&#10;        &lt;Text style={{ fontSize: 30, fontWeight: 'bold', color: '#16232E' }}&gt;核心知识点&lt;/Text&gt;&#13;&#10;        &lt;Text style={{ fontSize: 15, color: '#5A6B7A', marginTop: 10 }}&gt;· break / continue / wh…&lt;/Text&gt;&#13;&#10;    &lt;/Box&gt;&#13;&#10;    &lt;Box style={{ position: 'absolute', left: 0, top: 0, width: '1280px', height: '720px' }}&gt;&#13;&#10;        &lt;svg width='1280' height='720' viewBox='0 0 1280 720'&gt;&#13;&#10;            &lt;rect x='64' y='96' width='548' height='330' rx='12' fill='#FFFFFF' stroke='#D8E3EE' /&gt;&lt;rect x='64' y='96' width='548' height='4' rx='2' fill='#1F5FA8' /&gt;&lt;text x='82' y='130' fontSize='15.5' fontWeight='bold' fill='#1F5FA8' textAnchor='start' fontFamily='Microsoft YaHei'&gt;2.3 while 的核心：条件先行&lt;/text&gt;&lt;text x='82' y='169.0' fontSize='13' fill='#3A4A58' textAnchor='start' fontFamily='Microsoft YaHei'&gt;· 1. 条件为假时，循环体一次都不执行。&lt;/text&gt;&lt;text x='82' y='197.5' fontSize='13' fill='#3A4A58' textAnchor='start' fontFamily='Microsoft YaHei'&gt;· print(&quot;永远不会打印&quot;)&lt;/text&gt;&lt;text x='82' y='226.0' fontSize='13' fill='#3A4A58' textAnchor='start' fontFamily='Microsoft YaHei'&gt;· 2. 必须有让条件变假的那一行，否则进入死循环。&lt;/text&gt;&lt;rect x='668' y='96' width='548' height='330' rx='12' fill='#FFFFFF' stroke='#D8E3EE' /&gt;&lt;rect x='668' y='96' width='548' height='4' rx='2' fill='#1F5FA8' /&gt;&lt;text x='686' y='130' fontSize='15.5' fontWeight='bold' fill='#1F5FA8' textAnchor='start' fontFamily='Microsoft YaHei'&gt;2.4 break 与 continue&lt;/text&gt;&lt;text x='686' y='169.0' fontSize='13' fill='#3A4A58' textAnchor='start' fontFamily='Microsoft YaHei'&gt;· break 是&quot;提前下课&quot;——举手表说&quot;这节课剩下的不上了&quot;，直接走人。&lt;/text&gt;&lt;text x='686' y='197.5' fontSize='13' fill='#3A4A58' textAnchor='start' fontFamily='Microsoft YaHei'&gt;· continue 是&quot;这题跳过，下一题&quot;——留在教室里，只是跳过当前这一题。&lt;/text&gt;&lt;rect x='64' y='574' width='1152' height='66' rx='12' fill='#EEF5FB' /&gt;&lt;text x='84' y='616' fontSize='14' fill='#243444' textAnchor='start' fontFamily='Microsoft YaHei'&gt;看不懂的地方先回讲义对应小节读一遍，再回来对着这页复述一次——能讲出来才算真懂。&lt;/text&gt;&#13;&#10;            &lt;text x='64' y='684' fontSize='13' fill='#8A9AAA' fontFamily='Microsoft YaHei'&gt;Python 讲授课件 · 逐节版&lt;/text&gt;&#13;&#10;            &lt;text x='1216' y='684' fontSize='13' fill='#8A9AAA' textAnchor='end' fontFamily='Microsoft YaHei'&gt;单元 6 · 第 29 节&lt;/text&gt;&#13;&#10;        &lt;/svg&gt;&#13;&#10;    &lt;/Box&gt;&#13;&#10;&lt;/Slide&gt;&#13;&#10;"/>
         <p:cNvGrpSpPr/>
         <p:nvPr/>
       </p:nvGrpSpPr>
@@ -3062,7 +3062,7 @@
   <p:cSld>
     <p:spTree>
       <p:nvGrpSpPr>
-        <p:cNvPr id="68" name="" descr="&lt;Slide style={{ width: '1280px', height: '720px', backgroundColor: '#FAFCFE', padding: 0, position: 'relative', overflow: 'hidden' }}&gt;&#13;&#10;    &lt;Box style={{ position: 'absolute', left: 64, top: 36, width: '1152px', flexDirection: 'row', alignItems: 'center', gap: 12 }}&gt;&#13;&#10;        &lt;Box style={{ background: '#0E9B78', borderRadius: 5, padding: '3px 11px' }}&gt;&#13;&#10;            &lt;Text style={{ fontSize: 14, fontWeight: 'bold', color: '#FFFFFF' }}&gt;第 30 节&lt;/Text&gt;&#13;&#10;        &lt;/Box&gt;&#13;&#10;        &lt;Text style={{ fontSize: 30, fontWeight: 'bold', color: '#16232E' }}&gt;核心知识点&lt;/Text&gt;&#13;&#10;        &lt;Text style={{ fontSize: 15, color: '#5A6B7A', marginTop: 10 }}&gt;· 交互程序的骨架与收尾&lt;/Text&gt;&#13;&#10;    &lt;/Box&gt;&#13;&#10;    &lt;Box style={{ position: 'absolute', left: 0, top: 0, width: '1280px', height: '720px' }}&gt;&#13;&#10;        &lt;svg width='1280' height='720' viewBox='0 0 1280 720'&gt;&#13;&#10;            &lt;rect x='64' y='96' width='368' height='330' rx='12' fill='#FFFFFF' stroke='#D8E3EE' /&gt;&lt;rect x='64' y='96' width='368' height='4' rx='2' fill='#1F5FA8' /&gt;&lt;text x='82' y='130' fontSize='15.5' fontWeight='bold' fill='#1F5FA8' textAnchor='start' fontFamily='Microsoft YaHei'&gt;2.5 while ... else：&lt;/text&gt;&lt;text x='82' y='153' fontSize='15.5' fontWeight='bold' fill='#1F5FA8' textAnchor='start' fontFamily='Microsoft YaHei'&gt;循环&quot;没被打断&quot;时执行&lt;/text&gt;&lt;text x='82' y='192.0' fontSize='13' fill='#3A4A58' textAnchor='start' fontFamily='Microsoft YaHei'&gt;· 这是一个非常优雅但很少人用、却极其好用的结构：&lt;/text&gt;&lt;rect x='468' y='96' width='368' height='330' rx='12' fill='#FFFFFF' stroke='#D8E3EE' /&gt;&lt;rect x='468' y='96' width='368' height='4' rx='2' fill='#1F5FA8' /&gt;&lt;text x='486' y='130' fontSize='15.5' fontWeight='bold' fill='#1F5FA8' textAnchor='start' fontFamily='Microsoft YaHei'&gt;2.6 交互程序的骨架&lt;/text&gt;&lt;text x='486' y='169.0' fontSize='13' fill='#3A4A58' textAnchor='start' fontFamily='Microsoft YaHei'&gt;· 注意这个模式的关键点&lt;/text&gt;&lt;text x='486' y='197.5' fontSize='13' fill='#3A4A58' textAnchor='start' fontFamily='Microsoft YaHei'&gt;· while True 本身没有出口，唯一的出口是 break。&lt;/text&gt;&lt;text x='486' y='226.0' fontSize='13' fill='#3A4A58' textAnchor='start' fontFamily='Microsoft YaHei'&gt;· 所以每一条通向&quot;用户想退出&quot;的路径，都必须有&lt;/text&gt;&lt;text x='486' y='245.5' fontSize='13' fill='#3A4A58' textAnchor='start' fontFamily='Microsoft YaHei'&gt;break。&lt;/text&gt;&lt;rect x='872' y='96' width='368' height='330' rx='12' fill='#FFFFFF' stroke='#D8E3EE' /&gt;&lt;rect x='872' y='96' width='368' height='4' rx='2' fill='#1F5FA8' /&gt;&lt;text x='890' y='130' fontSize='15.5' fontWeight='bold' fill='#1F5FA8' textAnchor='start' fontFamily='Microsoft YaHei'&gt;2.7 用 while 处理列表和字典（教材 7.3）&lt;/text&gt;&lt;text x='890' y='169.0' fontSize='13' fill='#3A4A58' textAnchor='start' fontFamily='Microsoft YaHei'&gt;· ① 在列表之间搬元素。&lt;/text&gt;&lt;text x='890' y='197.5' fontSize='13' fill='#3A4A58' textAnchor='start' fontFamily='Microsoft YaHei'&gt;· ② 删除所有等于某值的元素。&lt;/text&gt;&lt;text x='890' y='226.0' fontSize='13' fill='#3A4A58' textAnchor='start' fontFamily='Microsoft YaHei'&gt;· ③ 用用户输入来填充字典。&lt;/text&gt;&lt;text x='64' y='470' fontSize='14.5' fontWeight='bold' fill='#0E9B78' textAnchor='start' fontFamily='Microsoft YaHei'&gt;本节的代码示例&lt;/text&gt;&lt;text x='64' y='500' fontSize='13' fill='#3A4A58' textAnchor='start' fontFamily='Microsoft YaHei'&gt;· input 的类型陷阱与三步模板&lt;/text&gt;&lt;text x='468' y='500' fontSize='13' fill='#3A4A58' textAnchor='start' fontFamily='Microsoft YaHei'&gt;· while 基本循环&lt;/text&gt;&lt;text x='872' y='500' fontSize='13' fill='#3A4A58' textAnchor='start' fontFamily='Microsoft YaHei'&gt;· break 与 continue&lt;/text&gt;&lt;rect x='64' y='574' width='1152' height='66' rx='12' fill='#EEF5FB' /&gt;&lt;text x='84' y='616' fontSize='14' fill='#243444' textAnchor='start' fontFamily='Microsoft YaHei'&gt;看不懂的地方先回讲义对应小节读一遍，再回来对着这页复述一次——能讲出来才算真懂。&lt;/text&gt;&#13;&#10;            &lt;text x='64' y='684' fontSize='13' fill='#8A9AAA' fontFamily='Microsoft YaHei'&gt;Python 讲授课件 · 逐节版&lt;/text&gt;&#13;&#10;            &lt;text x='1216' y='684' fontSize='13' fill='#8A9AAA' textAnchor='end' fontFamily='Microsoft YaHei'&gt;单元 6 · 第 30 节&lt;/text&gt;&#13;&#10;        &lt;/svg&gt;&#13;&#10;    &lt;/Box&gt;&#13;&#10;&lt;/Slide&gt;&#13;&#10;"/>
+        <p:cNvPr id="68" name="" descr="&lt;Slide style={{ width: '1280px', height: '720px', backgroundColor: '#FAFCFE', padding: 0, position: 'relative', overflow: 'hidden' }}&gt;&#13;&#10;    &lt;Box style={{ position: 'absolute', left: 64, top: 36, width: '1152px', flexDirection: 'row', alignItems: 'center', gap: 12 }}&gt;&#13;&#10;        &lt;Box style={{ background: '#0E9B78', borderRadius: 5, padding: '3px 11px' }}&gt;&#13;&#10;            &lt;Text style={{ fontSize: 14, fontWeight: 'bold', color: '#FFFFFF' }}&gt;第 30 节&lt;/Text&gt;&#13;&#10;        &lt;/Box&gt;&#13;&#10;        &lt;Text style={{ fontSize: 30, fontWeight: 'bold', color: '#16232E' }}&gt;核心知识点&lt;/Text&gt;&#13;&#10;        &lt;Text style={{ fontSize: 15, color: '#5A6B7A', marginTop: 10 }}&gt;· 交互程序的骨架与收尾&lt;/Text&gt;&#13;&#10;    &lt;/Box&gt;&#13;&#10;    &lt;Box style={{ position: 'absolute', left: 0, top: 0, width: '1280px', height: '720px' }}&gt;&#13;&#10;        &lt;svg width='1280' height='720' viewBox='0 0 1280 720'&gt;&#13;&#10;            &lt;rect x='64' y='96' width='368' height='330' rx='12' fill='#FFFFFF' stroke='#D8E3EE' /&gt;&lt;rect x='64' y='96' width='368' height='4' rx='2' fill='#1F5FA8' /&gt;&lt;text x='82' y='130' fontSize='15.5' fontWeight='bold' fill='#1F5FA8' textAnchor='start' fontFamily='Microsoft YaHei'&gt;2.5 while ... else：&lt;/text&gt;&lt;text x='82' y='153' fontSize='15.5' fontWeight='bold' fill='#1F5FA8' textAnchor='start' fontFamily='Microsoft YaHei'&gt;循环&quot;没被打断&quot;时执行&lt;/text&gt;&lt;text x='82' y='192.0' fontSize='13' fill='#3A4A58' textAnchor='start' fontFamily='Microsoft YaHei'&gt;· else 块只在循环正常走完（没有被 break&lt;/text&gt;&lt;text x='82' y='211.5' fontSize='13' fill='#3A4A58' textAnchor='start' fontFamily='Microsoft YaHei'&gt;打断）时执行。&lt;/text&gt;&lt;text x='82' y='240.0' fontSize='13' fill='#3A4A58' textAnchor='start' fontFamily='Microsoft YaHei'&gt;· &quot;如果这节课没被老师叫停，就说明大家表现好，&lt;/text&gt;&lt;text x='82' y='259.5' fontSize='13' fill='#3A4A58' textAnchor='start' fontFamily='Microsoft YaHei'&gt;下课&quot;。&lt;/text&gt;&lt;text x='82' y='288.0' fontSize='13' fill='#3A4A58' textAnchor='start' fontFamily='Microsoft YaHei'&gt;· 这段代码读起来非常自然：猜对了就 break 走人，&lt;/text&gt;&lt;text x='82' y='307.5' fontSize='13' fill='#3A4A58' textAnchor='start' fontFamily='Microsoft YaHei'&gt;猜满 3 次还没对就落进 else。&lt;/text&gt;&lt;rect x='468' y='96' width='368' height='330' rx='12' fill='#FFFFFF' stroke='#D8E3EE' /&gt;&lt;rect x='468' y='96' width='368' height='4' rx='2' fill='#1F5FA8' /&gt;&lt;text x='486' y='130' fontSize='15.5' fontWeight='bold' fill='#1F5FA8' textAnchor='start' fontFamily='Microsoft YaHei'&gt;2.6 交互程序的骨架&lt;/text&gt;&lt;text x='486' y='169.0' fontSize='13' fill='#3A4A58' textAnchor='start' fontFamily='Microsoft YaHei'&gt;· 注意这个模式的关键点&lt;/text&gt;&lt;text x='486' y='197.5' fontSize='13' fill='#3A4A58' textAnchor='start' fontFamily='Microsoft YaHei'&gt;· while True 本身没有出口，唯一的出口是 break。&lt;/text&gt;&lt;text x='486' y='226.0' fontSize='13' fill='#3A4A58' textAnchor='start' fontFamily='Microsoft YaHei'&gt;· 所以每一条通向&quot;用户想退出&quot;的路径，都必须有&lt;/text&gt;&lt;text x='486' y='245.5' fontSize='13' fill='#3A4A58' textAnchor='start' fontFamily='Microsoft YaHei'&gt;break。&lt;/text&gt;&lt;rect x='872' y='96' width='368' height='330' rx='12' fill='#FFFFFF' stroke='#D8E3EE' /&gt;&lt;rect x='872' y='96' width='368' height='4' rx='2' fill='#1F5FA8' /&gt;&lt;text x='890' y='130' fontSize='15.5' fontWeight='bold' fill='#1F5FA8' textAnchor='start' fontFamily='Microsoft YaHei'&gt;2.7 用 while 处理列表和字典（教材 7.3）&lt;/text&gt;&lt;text x='890' y='169.0' fontSize='13' fill='#3A4A58' textAnchor='start' fontFamily='Microsoft YaHei'&gt;· ① 在列表之间搬元素。&lt;/text&gt;&lt;text x='890' y='197.5' fontSize='13' fill='#3A4A58' textAnchor='start' fontFamily='Microsoft YaHei'&gt;· ② 删除所有等于某值的元素。&lt;/text&gt;&lt;text x='890' y='226.0' fontSize='13' fill='#3A4A58' textAnchor='start' fontFamily='Microsoft YaHei'&gt;· ③ 用用户输入来填充字典。&lt;/text&gt;&lt;text x='64' y='470' fontSize='14.5' fontWeight='bold' fill='#0E9B78' textAnchor='start' fontFamily='Microsoft YaHei'&gt;本节的代码示例&lt;/text&gt;&lt;text x='64' y='500' fontSize='13' fill='#3A4A58' textAnchor='start' fontFamily='Microsoft YaHei'&gt;· input 的类型陷阱与三步模板&lt;/text&gt;&lt;text x='468' y='500' fontSize='13' fill='#3A4A58' textAnchor='start' fontFamily='Microsoft YaHei'&gt;· while 基本循环&lt;/text&gt;&lt;text x='872' y='500' fontSize='13' fill='#3A4A58' textAnchor='start' fontFamily='Microsoft YaHei'&gt;· break 与 continue&lt;/text&gt;&lt;rect x='64' y='574' width='1152' height='66' rx='12' fill='#EEF5FB' /&gt;&lt;text x='84' y='616' fontSize='14' fill='#243444' textAnchor='start' fontFamily='Microsoft YaHei'&gt;看不懂的地方先回讲义对应小节读一遍，再回来对着这页复述一次——能讲出来才算真懂。&lt;/text&gt;&#13;&#10;            &lt;text x='64' y='684' fontSize='13' fill='#8A9AAA' fontFamily='Microsoft YaHei'&gt;Python 讲授课件 · 逐节版&lt;/text&gt;&#13;&#10;            &lt;text x='1216' y='684' fontSize='13' fill='#8A9AAA' textAnchor='end' fontFamily='Microsoft YaHei'&gt;单元 6 · 第 30 节&lt;/text&gt;&#13;&#10;        &lt;/svg&gt;&#13;&#10;    &lt;/Box&gt;&#13;&#10;&lt;/Slide&gt;&#13;&#10;"/>
         <p:cNvGrpSpPr/>
         <p:nvPr/>
       </p:nvGrpSpPr>
@@ -3493,7 +3493,7 @@
   <p:cSld>
     <p:spTree>
       <p:nvGrpSpPr>
-        <p:cNvPr id="81" name="" descr="&lt;Slide style={{ width: '1280px', height: '720px', backgroundColor: '#FAFCFE', padding: 0, position: 'relative', overflow: 'hidden' }}&gt;&#13;&#10;    &lt;Box style={{ position: 'absolute', left: 64, top: 36, width: '1152px', flexDirection: 'row', alignItems: 'center', gap: 12 }}&gt;&#13;&#10;        &lt;Box style={{ background: '#0E9B78', borderRadius: 5, padding: '3px 11px' }}&gt;&#13;&#10;            &lt;Text style={{ fontSize: 14, fontWeight: 'bold', color: '#FFFFFF' }}&gt;第 31 节&lt;/Text&gt;&#13;&#10;        &lt;/Box&gt;&#13;&#10;        &lt;Text style={{ fontSize: 30, fontWeight: 'bold', color: '#16232E' }}&gt;核心知识点&lt;/Text&gt;&#13;&#10;        &lt;Text style={{ fontSize: 15, color: '#5A6B7A', marginTop: 10 }}&gt;· 动手实战与答案讲评&lt;/Text&gt;&#13;&#10;    &lt;/Box&gt;&#13;&#10;    &lt;Box style={{ position: 'absolute', left: 0, top: 0, width: '1280px', height: '720px' }}&gt;&#13;&#10;        &lt;svg width='1280' height='720' viewBox='0 0 1280 720'&gt;&#13;&#10;            &lt;rect x='64' y='96' width='368' height='330' rx='12' fill='#FFFFFF' stroke='#D8E3EE' /&gt;&lt;rect x='64' y='96' width='368' height='4' rx='2' fill='#1F5FA8' /&gt;&lt;text x='82' y='130' fontSize='15.5' fontWeight='bold' fill='#1F5FA8' textAnchor='start' fontFamily='Microsoft YaHei'&gt;基础档&lt;/text&gt;&lt;text x='82' y='169.0' fontSize='13' fill='#3A4A58' textAnchor='start' fontFamily='Microsoft YaHei'&gt;· 练习 6-1【三步模板转换】&lt;/text&gt;&lt;text x='82' y='197.5' fontSize='13' fill='#3A4A58' textAnchor='start' fontFamily='Microsoft YaHei'&gt;· 练习 6-2【数字累加到 N】&lt;/text&gt;&lt;text x='82' y='226.0' fontSize='13' fill='#3A4A58' textAnchor='start' fontFamily='Microsoft YaHei'&gt;· 练习 6-3【倍数输出】&lt;/text&gt;&lt;rect x='468' y='96' width='368' height='330' rx='12' fill='#FFFFFF' stroke='#D8E3EE' /&gt;&lt;rect x='468' y='96' width='368' height='4' rx='2' fill='#1F5FA8' /&gt;&lt;text x='486' y='130' fontSize='15.5' fontWeight='bold' fill='#1F5FA8' textAnchor='start' fontFamily='Microsoft YaHei'&gt;进阶档&lt;/text&gt;&lt;text x='486' y='169.0' fontSize='13' fill='#3A4A58' textAnchor='start' fontFamily='Microsoft YaHei'&gt;· 练习 6-5🌐【猜数字游戏（完整版）】&lt;/text&gt;&lt;text x='486' y='197.5' fontSize='13' fill='#3A4A58' textAnchor='start' fontFamily='Microsoft YaHei'&gt;· 猜的数字太大 → &quot;太大了，再小一点&quot;&lt;/text&gt;&lt;text x='486' y='226.0' fontSize='13' fill='#3A4A58' textAnchor='start' fontFamily='Microsoft YaHei'&gt;· 猜的数字太小 → &quot;太小了，再大一点&quot;&lt;/text&gt;&lt;rect x='872' y='96' width='368' height='330' rx='12' fill='#FFFFFF' stroke='#D8E3EE' /&gt;&lt;rect x='872' y='96' width='368' height='4' rx='2' fill='#1F5FA8' /&gt;&lt;text x='890' y='130' fontSize='15.5' fontWeight='bold' fill='#1F5FA8' textAnchor='start' fontFamily='Microsoft YaHei'&gt;参考答案 6-1&lt;/text&gt;&lt;text x='890' y='169.0' fontSize='13' fill='#3A4A58' textAnchor='start' fontFamily='Microsoft YaHei'&gt;· name = input(&quot;请输入你的姓名：&quot;)&lt;/text&gt;&lt;rect x='64' y='574' width='1152' height='66' rx='12' fill='#EEF5FB' /&gt;&lt;text x='84' y='616' fontSize='14' fill='#243444' textAnchor='start' fontFamily='Microsoft YaHei'&gt;看不懂的地方先回讲义对应小节读一遍，再回来对着这页复述一次——能讲出来才算真懂。&lt;/text&gt;&#13;&#10;            &lt;text x='64' y='684' fontSize='13' fill='#8A9AAA' fontFamily='Microsoft YaHei'&gt;Python 讲授课件 · 逐节版&lt;/text&gt;&#13;&#10;            &lt;text x='1216' y='684' fontSize='13' fill='#8A9AAA' textAnchor='end' fontFamily='Microsoft YaHei'&gt;单元 6 · 第 31 节&lt;/text&gt;&#13;&#10;        &lt;/svg&gt;&#13;&#10;    &lt;/Box&gt;&#13;&#10;&lt;/Slide&gt;&#13;&#10;"/>
+        <p:cNvPr id="81" name="" descr="&lt;Slide style={{ width: '1280px', height: '720px', backgroundColor: '#FAFCFE', padding: 0, position: 'relative', overflow: 'hidden' }}&gt;&#13;&#10;    &lt;Box style={{ position: 'absolute', left: 64, top: 36, width: '1152px', flexDirection: 'row', alignItems: 'center', gap: 12 }}&gt;&#13;&#10;        &lt;Box style={{ background: '#0E9B78', borderRadius: 5, padding: '3px 11px' }}&gt;&#13;&#10;            &lt;Text style={{ fontSize: 14, fontWeight: 'bold', color: '#FFFFFF' }}&gt;第 31 节&lt;/Text&gt;&#13;&#10;        &lt;/Box&gt;&#13;&#10;        &lt;Text style={{ fontSize: 30, fontWeight: 'bold', color: '#16232E' }}&gt;核心知识点&lt;/Text&gt;&#13;&#10;        &lt;Text style={{ fontSize: 15, color: '#5A6B7A', marginTop: 10 }}&gt;· 动手实战与答案讲评&lt;/Text&gt;&#13;&#10;    &lt;/Box&gt;&#13;&#10;    &lt;Box style={{ position: 'absolute', left: 0, top: 0, width: '1280px', height: '720px' }}&gt;&#13;&#10;        &lt;svg width='1280' height='720' viewBox='0 0 1280 720'&gt;&#13;&#10;            &lt;rect x='64' y='96' width='368' height='330' rx='12' fill='#FFFFFF' stroke='#D8E3EE' /&gt;&lt;rect x='64' y='96' width='368' height='4' rx='2' fill='#1F5FA8' /&gt;&lt;text x='82' y='130' fontSize='15.5' fontWeight='bold' fill='#1F5FA8' textAnchor='start' fontFamily='Microsoft YaHei'&gt;基础档&lt;/text&gt;&lt;text x='82' y='169.0' fontSize='13' fill='#3A4A58' textAnchor='start' fontFamily='Microsoft YaHei'&gt;· 练习 6-1【三步模板转换】&lt;/text&gt;&lt;text x='82' y='197.5' fontSize='13' fill='#3A4A58' textAnchor='start' fontFamily='Microsoft YaHei'&gt;· 练习 6-2【数字累加到 N】&lt;/text&gt;&lt;text x='82' y='226.0' fontSize='13' fill='#3A4A58' textAnchor='start' fontFamily='Microsoft YaHei'&gt;· 练习 6-3【倍数输出】&lt;/text&gt;&lt;rect x='468' y='96' width='368' height='330' rx='12' fill='#FFFFFF' stroke='#D8E3EE' /&gt;&lt;rect x='468' y='96' width='368' height='4' rx='2' fill='#1F5FA8' /&gt;&lt;text x='486' y='130' fontSize='15.5' fontWeight='bold' fill='#1F5FA8' textAnchor='start' fontFamily='Microsoft YaHei'&gt;进阶档&lt;/text&gt;&lt;text x='486' y='169.0' fontSize='13' fill='#3A4A58' textAnchor='start' fontFamily='Microsoft YaHei'&gt;· 练习 6-5🌐【猜数字游戏（完整版）】&lt;/text&gt;&lt;text x='486' y='197.5' fontSize='13' fill='#3A4A58' textAnchor='start' fontFamily='Microsoft YaHei'&gt;· 猜的数字太大 → &quot;太大了，再小一点&quot;&lt;/text&gt;&lt;text x='486' y='226.0' fontSize='13' fill='#3A4A58' textAnchor='start' fontFamily='Microsoft YaHei'&gt;· 猜的数字太小 → &quot;太小了，再大一点&quot;&lt;/text&gt;&lt;rect x='872' y='96' width='368' height='330' rx='12' fill='#FFFFFF' stroke='#D8E3EE' /&gt;&lt;rect x='872' y='96' width='368' height='4' rx='2' fill='#1F5FA8' /&gt;&lt;text x='890' y='130' fontSize='15.5' fontWeight='bold' fill='#1F5FA8' textAnchor='start' fontFamily='Microsoft YaHei'&gt;参考答案 6-9&lt;/text&gt;&lt;text x='890' y='169.0' fontSize='13' fill='#3A4A58' textAnchor='start' fontFamily='Microsoft YaHei'&gt;· 如果写成 for s in scores2:（不加 [:]）…&lt;/text&gt;&lt;rect x='64' y='574' width='1152' height='66' rx='12' fill='#EEF5FB' /&gt;&lt;text x='84' y='616' fontSize='14' fill='#243444' textAnchor='start' fontFamily='Microsoft YaHei'&gt;看不懂的地方先回讲义对应小节读一遍，再回来对着这页复述一次——能讲出来才算真懂。&lt;/text&gt;&#13;&#10;            &lt;text x='64' y='684' fontSize='13' fill='#8A9AAA' fontFamily='Microsoft YaHei'&gt;Python 讲授课件 · 逐节版&lt;/text&gt;&#13;&#10;            &lt;text x='1216' y='684' fontSize='13' fill='#8A9AAA' textAnchor='end' fontFamily='Microsoft YaHei'&gt;单元 6 · 第 31 节&lt;/text&gt;&#13;&#10;        &lt;/svg&gt;&#13;&#10;    &lt;/Box&gt;&#13;&#10;&lt;/Slide&gt;&#13;&#10;"/>
         <p:cNvGrpSpPr/>
         <p:nvPr/>
       </p:nvGrpSpPr>

--- a/python-course-ppt/逐节课件/Python讲授课件-单元06.pptx
+++ b/python-course-ppt/逐节课件/Python讲授课件-单元06.pptx
@@ -236,6 +236,1254 @@
     </a:lvl9pPr>
   </p:notesStyle>
 </p:notesMaster>
+</file>
+
+<file path=ppt/notesSlides/notesSlide1.xml><?xml version="1.0" encoding="utf-8"?>
+<p:notes xmlns:a="http://schemas.openxmlformats.org/drawingml/2006/main" xmlns:p="http://schemas.openxmlformats.org/presentationml/2006/main" xmlns:r="http://schemas.openxmlformats.org/officeDocument/2006/relationships">
+  <p:cSld>
+    <p:spTree>
+      <p:nvGrpSpPr>
+        <p:cNvPr id="1" name=""/>
+        <p:cNvGrpSpPr/>
+        <p:nvPr/>
+      </p:nvGrpSpPr>
+      <p:grpSpPr>
+        <a:xfrm>
+          <a:off x="0" y="0"/>
+          <a:ext cx="0" cy="0"/>
+          <a:chOff x="0" y="0"/>
+          <a:chExt cx="0" cy="0"/>
+        </a:xfrm>
+      </p:grpSpPr>
+      <p:sp>
+        <p:nvSpPr>
+          <p:cNvPr id="2" name="讲课提示"/>
+          <p:cNvSpPr txBox="1"/>
+          <p:nvPr/>
+        </p:nvSpPr>
+        <p:spPr>
+          <a:xfrm>
+            <a:off x="457200" y="457200"/>
+            <a:ext cx="6858000" cy="4800600"/>
+          </a:xfrm>
+          <a:prstGeom prst="rect">
+            <a:avLst/>
+          </a:prstGeom>
+        </p:spPr>
+        <p:txBody>
+          <a:bodyPr wrap="square"/>
+          <a:lstStyle/>
+          <a:p>
+            <a:r>
+              <a:rPr lang="zh-CN" dirty="0"/>
+              <a:t>单元 6 · 单元 6 · 用户输入与 while 循环</a:t>
+            </a:r>
+          </a:p>
+          <a:p>
+            <a:r>
+              <a:rPr lang="zh-CN" dirty="0"/>
+              <a:t/>
+            </a:r>
+          </a:p>
+          <a:p>
+            <a:r>
+              <a:rPr lang="zh-CN" dirty="0"/>
+              <a:t>本单元包含以下课节：</a:t>
+            </a:r>
+          </a:p>
+          <a:p>
+            <a:r>
+              <a:rPr lang="zh-CN" dirty="0"/>
+              <a:t>· 第 28 节 input() 的铁律与 for/while 之争</a:t>
+            </a:r>
+          </a:p>
+          <a:p>
+            <a:r>
+              <a:rPr lang="zh-CN" dirty="0"/>
+              <a:t>· 第 29 节 break / continue / while-else</a:t>
+            </a:r>
+          </a:p>
+          <a:p>
+            <a:r>
+              <a:rPr lang="zh-CN" dirty="0"/>
+              <a:t>· 第 30 节 交互程序的骨架与收尾</a:t>
+            </a:r>
+          </a:p>
+          <a:p>
+            <a:r>
+              <a:rPr lang="zh-CN" dirty="0"/>
+              <a:t>· 第 31 节 动手实战与答案讲评</a:t>
+            </a:r>
+          </a:p>
+          <a:p>
+            <a:r>
+              <a:rPr lang="zh-CN" dirty="0"/>
+              <a:t>· 第 32 节 单元 6 验收复盘</a:t>
+            </a:r>
+          </a:p>
+          <a:p>
+            <a:r>
+              <a:rPr lang="zh-CN" dirty="0"/>
+              <a:t/>
+            </a:r>
+          </a:p>
+          <a:p>
+            <a:r>
+              <a:rPr lang="zh-CN" dirty="0"/>
+              <a:t>开场用 3 分钟讲清：这个单元学完能做出什么，最后会被关卡怎么验。</a:t>
+            </a:r>
+          </a:p>
+        </p:txBody>
+      </p:sp>
+    </p:spTree>
+  </p:cSld>
+  <p:clrMapOvr>
+    <a:masterClrMapping/>
+  </p:clrMapOvr>
+</p:notes>
+</file>
+
+<file path=ppt/notesSlides/notesSlide10.xml><?xml version="1.0" encoding="utf-8"?>
+<p:notes xmlns:a="http://schemas.openxmlformats.org/drawingml/2006/main" xmlns:p="http://schemas.openxmlformats.org/presentationml/2006/main" xmlns:r="http://schemas.openxmlformats.org/officeDocument/2006/relationships">
+  <p:cSld>
+    <p:spTree>
+      <p:nvGrpSpPr>
+        <p:cNvPr id="1" name=""/>
+        <p:cNvGrpSpPr/>
+        <p:nvPr/>
+      </p:nvGrpSpPr>
+      <p:grpSpPr>
+        <a:xfrm>
+          <a:off x="0" y="0"/>
+          <a:ext cx="0" cy="0"/>
+          <a:chOff x="0" y="0"/>
+          <a:chExt cx="0" cy="0"/>
+        </a:xfrm>
+      </p:grpSpPr>
+      <p:sp>
+        <p:nvSpPr>
+          <p:cNvPr id="2" name="讲课提示"/>
+          <p:cNvSpPr txBox="1"/>
+          <p:nvPr/>
+        </p:nvSpPr>
+        <p:spPr>
+          <a:xfrm>
+            <a:off x="457200" y="457200"/>
+            <a:ext cx="6858000" cy="4800600"/>
+          </a:xfrm>
+          <a:prstGeom prst="rect">
+            <a:avLst/>
+          </a:prstGeom>
+        </p:spPr>
+        <p:txBody>
+          <a:bodyPr wrap="square"/>
+          <a:lstStyle/>
+          <a:p>
+            <a:r>
+              <a:rPr lang="zh-CN" dirty="0"/>
+              <a:t>第 32 节 · 单元 6 验收复盘</a:t>
+            </a:r>
+          </a:p>
+          <a:p>
+            <a:r>
+              <a:rPr lang="zh-CN" dirty="0"/>
+              <a:t>单元 6 · 用户输入与 while 循环 · W6</a:t>
+            </a:r>
+          </a:p>
+          <a:p>
+            <a:r>
+              <a:rPr lang="zh-CN" dirty="0"/>
+              <a:t/>
+            </a:r>
+          </a:p>
+          <a:p>
+            <a:r>
+              <a:rPr lang="zh-CN" dirty="0"/>
+              <a:t>学习目标：确认 input 转换、循环控制、交互骨架都过关</a:t>
+            </a:r>
+          </a:p>
+          <a:p>
+            <a:r>
+              <a:rPr lang="zh-CN" dirty="0"/>
+              <a:t/>
+            </a:r>
+          </a:p>
+          <a:p>
+            <a:r>
+              <a:rPr lang="zh-CN" dirty="0"/>
+              <a:t>课堂实操（40 分钟，不看答案）：</a:t>
+            </a:r>
+          </a:p>
+          <a:p>
+            <a:r>
+              <a:rPr lang="zh-CN" dirty="0"/>
+              <a:t>· 逐条打勾验收自测</a:t>
+            </a:r>
+          </a:p>
+          <a:p>
+            <a:r>
+              <a:rPr lang="zh-CN" dirty="0"/>
+              <a:t>· 现场演示死循环的自救过程</a:t>
+            </a:r>
+          </a:p>
+          <a:p>
+            <a:r>
+              <a:rPr lang="zh-CN" dirty="0"/>
+              <a:t/>
+            </a:r>
+          </a:p>
+          <a:p>
+            <a:r>
+              <a:rPr lang="zh-CN" dirty="0"/>
+              <a:t>课后作业：</a:t>
+            </a:r>
+          </a:p>
+          <a:p>
+            <a:r>
+              <a:rPr lang="zh-CN" dirty="0"/>
+              <a:t>· 完成本单元小结与产出检查</a:t>
+            </a:r>
+          </a:p>
+          <a:p>
+            <a:r>
+              <a:rPr lang="zh-CN" dirty="0"/>
+              <a:t/>
+            </a:r>
+          </a:p>
+          <a:p>
+            <a:r>
+              <a:rPr lang="zh-CN" dirty="0"/>
+              <a:t>节奏：讲 20 分钟 → 学员自己敲 40 分钟（不看答案）→ 对讲评自查 20 分钟 → 写作业 10 分钟。</a:t>
+            </a:r>
+          </a:p>
+        </p:txBody>
+      </p:sp>
+    </p:spTree>
+  </p:cSld>
+  <p:clrMapOvr>
+    <a:masterClrMapping/>
+  </p:clrMapOvr>
+</p:notes>
+</file>
+
+<file path=ppt/notesSlides/notesSlide11.xml><?xml version="1.0" encoding="utf-8"?>
+<p:notes xmlns:a="http://schemas.openxmlformats.org/drawingml/2006/main" xmlns:p="http://schemas.openxmlformats.org/presentationml/2006/main" xmlns:r="http://schemas.openxmlformats.org/officeDocument/2006/relationships">
+  <p:cSld>
+    <p:spTree>
+      <p:nvGrpSpPr>
+        <p:cNvPr id="1" name=""/>
+        <p:cNvGrpSpPr/>
+        <p:nvPr/>
+      </p:nvGrpSpPr>
+      <p:grpSpPr>
+        <a:xfrm>
+          <a:off x="0" y="0"/>
+          <a:ext cx="0" cy="0"/>
+          <a:chOff x="0" y="0"/>
+          <a:chExt cx="0" cy="0"/>
+        </a:xfrm>
+      </p:grpSpPr>
+      <p:sp>
+        <p:nvSpPr>
+          <p:cNvPr id="2" name="讲课提示"/>
+          <p:cNvSpPr txBox="1"/>
+          <p:nvPr/>
+        </p:nvSpPr>
+        <p:spPr>
+          <a:xfrm>
+            <a:off x="457200" y="457200"/>
+            <a:ext cx="6858000" cy="4800600"/>
+          </a:xfrm>
+          <a:prstGeom prst="rect">
+            <a:avLst/>
+          </a:prstGeom>
+        </p:spPr>
+        <p:txBody>
+          <a:bodyPr wrap="square"/>
+          <a:lstStyle/>
+          <a:p>
+            <a:r>
+              <a:rPr lang="zh-CN" dirty="0"/>
+              <a:t>第 32 节 · 核心知识点：单元 6 验收复盘</a:t>
+            </a:r>
+          </a:p>
+          <a:p>
+            <a:r>
+              <a:rPr lang="zh-CN" dirty="0"/>
+              <a:t/>
+            </a:r>
+          </a:p>
+          <a:p>
+            <a:r>
+              <a:rPr lang="zh-CN" dirty="0"/>
+              <a:t>讲这一页时：先让学生说出上节课的结论，再逐块讲要点。</a:t>
+            </a:r>
+          </a:p>
+          <a:p>
+            <a:r>
+              <a:rPr lang="zh-CN" dirty="0"/>
+              <a:t>每讲完一块，问一句「这一步如果写错了，报错会长什么样？」——把错误提前讲。</a:t>
+            </a:r>
+          </a:p>
+          <a:p>
+            <a:r>
+              <a:rPr lang="zh-CN" dirty="0"/>
+              <a:t/>
+            </a:r>
+          </a:p>
+          <a:p>
+            <a:r>
+              <a:rPr lang="zh-CN" dirty="0"/>
+              <a:t>本节目标：确认 input 转换、循环控制、交互骨架都过关</a:t>
+            </a:r>
+          </a:p>
+          <a:p>
+            <a:r>
+              <a:rPr lang="zh-CN" dirty="0"/>
+              <a:t/>
+            </a:r>
+          </a:p>
+          <a:p>
+            <a:r>
+              <a:rPr lang="zh-CN" dirty="0"/>
+              <a:t>看不到懂的地方，回讲义对应小节读一遍，再回来对着这页复述一次——能讲出来才算真懂。</a:t>
+            </a:r>
+          </a:p>
+        </p:txBody>
+      </p:sp>
+    </p:spTree>
+  </p:cSld>
+  <p:clrMapOvr>
+    <a:masterClrMapping/>
+  </p:clrMapOvr>
+</p:notes>
+</file>
+
+<file path=ppt/notesSlides/notesSlide12.xml><?xml version="1.0" encoding="utf-8"?>
+<p:notes xmlns:a="http://schemas.openxmlformats.org/drawingml/2006/main" xmlns:p="http://schemas.openxmlformats.org/presentationml/2006/main" xmlns:r="http://schemas.openxmlformats.org/officeDocument/2006/relationships">
+  <p:cSld>
+    <p:spTree>
+      <p:nvGrpSpPr>
+        <p:cNvPr id="1" name=""/>
+        <p:cNvGrpSpPr/>
+        <p:nvPr/>
+      </p:nvGrpSpPr>
+      <p:grpSpPr>
+        <a:xfrm>
+          <a:off x="0" y="0"/>
+          <a:ext cx="0" cy="0"/>
+          <a:chOff x="0" y="0"/>
+          <a:chExt cx="0" cy="0"/>
+        </a:xfrm>
+      </p:grpSpPr>
+      <p:sp>
+        <p:nvSpPr>
+          <p:cNvPr id="2" name="讲课提示"/>
+          <p:cNvSpPr txBox="1"/>
+          <p:nvPr/>
+        </p:nvSpPr>
+        <p:spPr>
+          <a:xfrm>
+            <a:off x="457200" y="457200"/>
+            <a:ext cx="6858000" cy="4800600"/>
+          </a:xfrm>
+          <a:prstGeom prst="rect">
+            <a:avLst/>
+          </a:prstGeom>
+        </p:spPr>
+        <p:txBody>
+          <a:bodyPr wrap="square"/>
+          <a:lstStyle/>
+          <a:p>
+            <a:r>
+              <a:rPr lang="zh-CN" dirty="0"/>
+              <a:t>单元 6 小结 · 单元 6 · 小结</a:t>
+            </a:r>
+          </a:p>
+          <a:p>
+            <a:r>
+              <a:rPr lang="zh-CN" dirty="0"/>
+              <a:t/>
+            </a:r>
+          </a:p>
+          <a:p>
+            <a:r>
+              <a:rPr lang="zh-CN" dirty="0"/>
+              <a:t>收尾动作：让学生合上讲义，口述本单元三个最重要的结论；说不出来的，回对应课节。</a:t>
+            </a:r>
+          </a:p>
+          <a:p>
+            <a:r>
+              <a:rPr lang="zh-CN" dirty="0"/>
+              <a:t>然后当场勾一遍本单元课节的「已完成」，没打勾的进下一单元前补掉。</a:t>
+            </a:r>
+          </a:p>
+        </p:txBody>
+      </p:sp>
+    </p:spTree>
+  </p:cSld>
+  <p:clrMapOvr>
+    <a:masterClrMapping/>
+  </p:clrMapOvr>
+</p:notes>
+</file>
+
+<file path=ppt/notesSlides/notesSlide2.xml><?xml version="1.0" encoding="utf-8"?>
+<p:notes xmlns:a="http://schemas.openxmlformats.org/drawingml/2006/main" xmlns:p="http://schemas.openxmlformats.org/presentationml/2006/main" xmlns:r="http://schemas.openxmlformats.org/officeDocument/2006/relationships">
+  <p:cSld>
+    <p:spTree>
+      <p:nvGrpSpPr>
+        <p:cNvPr id="1" name=""/>
+        <p:cNvGrpSpPr/>
+        <p:nvPr/>
+      </p:nvGrpSpPr>
+      <p:grpSpPr>
+        <a:xfrm>
+          <a:off x="0" y="0"/>
+          <a:ext cx="0" cy="0"/>
+          <a:chOff x="0" y="0"/>
+          <a:chExt cx="0" cy="0"/>
+        </a:xfrm>
+      </p:grpSpPr>
+      <p:sp>
+        <p:nvSpPr>
+          <p:cNvPr id="2" name="讲课提示"/>
+          <p:cNvSpPr txBox="1"/>
+          <p:nvPr/>
+        </p:nvSpPr>
+        <p:spPr>
+          <a:xfrm>
+            <a:off x="457200" y="457200"/>
+            <a:ext cx="6858000" cy="4800600"/>
+          </a:xfrm>
+          <a:prstGeom prst="rect">
+            <a:avLst/>
+          </a:prstGeom>
+        </p:spPr>
+        <p:txBody>
+          <a:bodyPr wrap="square"/>
+          <a:lstStyle/>
+          <a:p>
+            <a:r>
+              <a:rPr lang="zh-CN" dirty="0"/>
+              <a:t>第 28 节 · input() 的铁律与 for/while 之争</a:t>
+            </a:r>
+          </a:p>
+          <a:p>
+            <a:r>
+              <a:rPr lang="zh-CN" dirty="0"/>
+              <a:t>单元 6 · 用户输入与 while 循环 · W6</a:t>
+            </a:r>
+          </a:p>
+          <a:p>
+            <a:r>
+              <a:rPr lang="zh-CN" dirty="0"/>
+              <a:t/>
+            </a:r>
+          </a:p>
+          <a:p>
+            <a:r>
+              <a:rPr lang="zh-CN" dirty="0"/>
+              <a:t>学习目标：牢记「拿回来的永远是字符串」，知道什么时候该用 while</a:t>
+            </a:r>
+          </a:p>
+          <a:p>
+            <a:r>
+              <a:rPr lang="zh-CN" dirty="0"/>
+              <a:t/>
+            </a:r>
+          </a:p>
+          <a:p>
+            <a:r>
+              <a:rPr lang="zh-CN" dirty="0"/>
+              <a:t>课堂实操（40 分钟，不看答案）：</a:t>
+            </a:r>
+          </a:p>
+          <a:p>
+            <a:r>
+              <a:rPr lang="zh-CN" dirty="0"/>
+              <a:t>· 故意不写 int() 体会类型陷阱</a:t>
+            </a:r>
+          </a:p>
+          <a:p>
+            <a:r>
+              <a:rPr lang="zh-CN" dirty="0"/>
+              <a:t>· 现场写一个死循环再自救</a:t>
+            </a:r>
+          </a:p>
+          <a:p>
+            <a:r>
+              <a:rPr lang="zh-CN" dirty="0"/>
+              <a:t/>
+            </a:r>
+          </a:p>
+          <a:p>
+            <a:r>
+              <a:rPr lang="zh-CN" dirty="0"/>
+              <a:t>课后作业：</a:t>
+            </a:r>
+          </a:p>
+          <a:p>
+            <a:r>
+              <a:rPr lang="zh-CN" dirty="0"/>
+              <a:t>· 完成动手练习 6-1 ~ 6-3</a:t>
+            </a:r>
+          </a:p>
+          <a:p>
+            <a:r>
+              <a:rPr lang="zh-CN" dirty="0"/>
+              <a:t/>
+            </a:r>
+          </a:p>
+          <a:p>
+            <a:r>
+              <a:rPr lang="zh-CN" dirty="0"/>
+              <a:t>节奏：讲 20 分钟 → 学员自己敲 40 分钟（不看答案）→ 对讲评自查 20 分钟 → 写作业 10 分钟。</a:t>
+            </a:r>
+          </a:p>
+        </p:txBody>
+      </p:sp>
+    </p:spTree>
+  </p:cSld>
+  <p:clrMapOvr>
+    <a:masterClrMapping/>
+  </p:clrMapOvr>
+</p:notes>
+</file>
+
+<file path=ppt/notesSlides/notesSlide3.xml><?xml version="1.0" encoding="utf-8"?>
+<p:notes xmlns:a="http://schemas.openxmlformats.org/drawingml/2006/main" xmlns:p="http://schemas.openxmlformats.org/presentationml/2006/main" xmlns:r="http://schemas.openxmlformats.org/officeDocument/2006/relationships">
+  <p:cSld>
+    <p:spTree>
+      <p:nvGrpSpPr>
+        <p:cNvPr id="1" name=""/>
+        <p:cNvGrpSpPr/>
+        <p:nvPr/>
+      </p:nvGrpSpPr>
+      <p:grpSpPr>
+        <a:xfrm>
+          <a:off x="0" y="0"/>
+          <a:ext cx="0" cy="0"/>
+          <a:chOff x="0" y="0"/>
+          <a:chExt cx="0" cy="0"/>
+        </a:xfrm>
+      </p:grpSpPr>
+      <p:sp>
+        <p:nvSpPr>
+          <p:cNvPr id="2" name="讲课提示"/>
+          <p:cNvSpPr txBox="1"/>
+          <p:nvPr/>
+        </p:nvSpPr>
+        <p:spPr>
+          <a:xfrm>
+            <a:off x="457200" y="457200"/>
+            <a:ext cx="6858000" cy="4800600"/>
+          </a:xfrm>
+          <a:prstGeom prst="rect">
+            <a:avLst/>
+          </a:prstGeom>
+        </p:spPr>
+        <p:txBody>
+          <a:bodyPr wrap="square"/>
+          <a:lstStyle/>
+          <a:p>
+            <a:r>
+              <a:rPr lang="zh-CN" dirty="0"/>
+              <a:t>第 28 节 · 核心知识点：input() 的铁律与 for/while 之争</a:t>
+            </a:r>
+          </a:p>
+          <a:p>
+            <a:r>
+              <a:rPr lang="zh-CN" dirty="0"/>
+              <a:t/>
+            </a:r>
+          </a:p>
+          <a:p>
+            <a:r>
+              <a:rPr lang="zh-CN" dirty="0"/>
+              <a:t>讲这一页时：先让学生说出上节课的结论，再逐块讲要点。</a:t>
+            </a:r>
+          </a:p>
+          <a:p>
+            <a:r>
+              <a:rPr lang="zh-CN" dirty="0"/>
+              <a:t>每讲完一块，问一句「这一步如果写错了，报错会长什么样？」——把错误提前讲。</a:t>
+            </a:r>
+          </a:p>
+          <a:p>
+            <a:r>
+              <a:rPr lang="zh-CN" dirty="0"/>
+              <a:t/>
+            </a:r>
+          </a:p>
+          <a:p>
+            <a:r>
+              <a:rPr lang="zh-CN" dirty="0"/>
+              <a:t>本节目标：牢记「拿回来的永远是字符串」，知道什么时候该用 while</a:t>
+            </a:r>
+          </a:p>
+          <a:p>
+            <a:r>
+              <a:rPr lang="zh-CN" dirty="0"/>
+              <a:t/>
+            </a:r>
+          </a:p>
+          <a:p>
+            <a:r>
+              <a:rPr lang="zh-CN" dirty="0"/>
+              <a:t>看不到懂的地方，回讲义对应小节读一遍，再回来对着这页复述一次——能讲出来才算真懂。</a:t>
+            </a:r>
+          </a:p>
+        </p:txBody>
+      </p:sp>
+    </p:spTree>
+  </p:cSld>
+  <p:clrMapOvr>
+    <a:masterClrMapping/>
+  </p:clrMapOvr>
+</p:notes>
+</file>
+
+<file path=ppt/notesSlides/notesSlide4.xml><?xml version="1.0" encoding="utf-8"?>
+<p:notes xmlns:a="http://schemas.openxmlformats.org/drawingml/2006/main" xmlns:p="http://schemas.openxmlformats.org/presentationml/2006/main" xmlns:r="http://schemas.openxmlformats.org/officeDocument/2006/relationships">
+  <p:cSld>
+    <p:spTree>
+      <p:nvGrpSpPr>
+        <p:cNvPr id="1" name=""/>
+        <p:cNvGrpSpPr/>
+        <p:nvPr/>
+      </p:nvGrpSpPr>
+      <p:grpSpPr>
+        <a:xfrm>
+          <a:off x="0" y="0"/>
+          <a:ext cx="0" cy="0"/>
+          <a:chOff x="0" y="0"/>
+          <a:chExt cx="0" cy="0"/>
+        </a:xfrm>
+      </p:grpSpPr>
+      <p:sp>
+        <p:nvSpPr>
+          <p:cNvPr id="2" name="讲课提示"/>
+          <p:cNvSpPr txBox="1"/>
+          <p:nvPr/>
+        </p:nvSpPr>
+        <p:spPr>
+          <a:xfrm>
+            <a:off x="457200" y="457200"/>
+            <a:ext cx="6858000" cy="4800600"/>
+          </a:xfrm>
+          <a:prstGeom prst="rect">
+            <a:avLst/>
+          </a:prstGeom>
+        </p:spPr>
+        <p:txBody>
+          <a:bodyPr wrap="square"/>
+          <a:lstStyle/>
+          <a:p>
+            <a:r>
+              <a:rPr lang="zh-CN" dirty="0"/>
+              <a:t>第 29 节 · break / continue / while-else</a:t>
+            </a:r>
+          </a:p>
+          <a:p>
+            <a:r>
+              <a:rPr lang="zh-CN" dirty="0"/>
+              <a:t>单元 6 · 用户输入与 while 循环 · W6</a:t>
+            </a:r>
+          </a:p>
+          <a:p>
+            <a:r>
+              <a:rPr lang="zh-CN" dirty="0"/>
+              <a:t/>
+            </a:r>
+          </a:p>
+          <a:p>
+            <a:r>
+              <a:rPr lang="zh-CN" dirty="0"/>
+              <a:t>学习目标：掌握 break、continue 与 while...else 的执行时机</a:t>
+            </a:r>
+          </a:p>
+          <a:p>
+            <a:r>
+              <a:rPr lang="zh-CN" dirty="0"/>
+              <a:t/>
+            </a:r>
+          </a:p>
+          <a:p>
+            <a:r>
+              <a:rPr lang="zh-CN" dirty="0"/>
+              <a:t>课堂实操（40 分钟，不看答案）：</a:t>
+            </a:r>
+          </a:p>
+          <a:p>
+            <a:r>
+              <a:rPr lang="zh-CN" dirty="0"/>
+              <a:t>· 写一个只接受正数的输入循环，故意输入字母看是否崩</a:t>
+            </a:r>
+          </a:p>
+          <a:p>
+            <a:r>
+              <a:rPr lang="zh-CN" dirty="0"/>
+              <a:t>· 演示 while...else 的执行时机</a:t>
+            </a:r>
+          </a:p>
+          <a:p>
+            <a:r>
+              <a:rPr lang="zh-CN" dirty="0"/>
+              <a:t/>
+            </a:r>
+          </a:p>
+          <a:p>
+            <a:r>
+              <a:rPr lang="zh-CN" dirty="0"/>
+              <a:t>课后作业：</a:t>
+            </a:r>
+          </a:p>
+          <a:p>
+            <a:r>
+              <a:rPr lang="zh-CN" dirty="0"/>
+              <a:t>· 完成动手练习 6-4 ~ 6-6</a:t>
+            </a:r>
+          </a:p>
+          <a:p>
+            <a:r>
+              <a:rPr lang="zh-CN" dirty="0"/>
+              <a:t/>
+            </a:r>
+          </a:p>
+          <a:p>
+            <a:r>
+              <a:rPr lang="zh-CN" dirty="0"/>
+              <a:t>节奏：讲 20 分钟 → 学员自己敲 40 分钟（不看答案）→ 对讲评自查 20 分钟 → 写作业 10 分钟。</a:t>
+            </a:r>
+          </a:p>
+        </p:txBody>
+      </p:sp>
+    </p:spTree>
+  </p:cSld>
+  <p:clrMapOvr>
+    <a:masterClrMapping/>
+  </p:clrMapOvr>
+</p:notes>
+</file>
+
+<file path=ppt/notesSlides/notesSlide5.xml><?xml version="1.0" encoding="utf-8"?>
+<p:notes xmlns:a="http://schemas.openxmlformats.org/drawingml/2006/main" xmlns:p="http://schemas.openxmlformats.org/presentationml/2006/main" xmlns:r="http://schemas.openxmlformats.org/officeDocument/2006/relationships">
+  <p:cSld>
+    <p:spTree>
+      <p:nvGrpSpPr>
+        <p:cNvPr id="1" name=""/>
+        <p:cNvGrpSpPr/>
+        <p:nvPr/>
+      </p:nvGrpSpPr>
+      <p:grpSpPr>
+        <a:xfrm>
+          <a:off x="0" y="0"/>
+          <a:ext cx="0" cy="0"/>
+          <a:chOff x="0" y="0"/>
+          <a:chExt cx="0" cy="0"/>
+        </a:xfrm>
+      </p:grpSpPr>
+      <p:sp>
+        <p:nvSpPr>
+          <p:cNvPr id="2" name="讲课提示"/>
+          <p:cNvSpPr txBox="1"/>
+          <p:nvPr/>
+        </p:nvSpPr>
+        <p:spPr>
+          <a:xfrm>
+            <a:off x="457200" y="457200"/>
+            <a:ext cx="6858000" cy="4800600"/>
+          </a:xfrm>
+          <a:prstGeom prst="rect">
+            <a:avLst/>
+          </a:prstGeom>
+        </p:spPr>
+        <p:txBody>
+          <a:bodyPr wrap="square"/>
+          <a:lstStyle/>
+          <a:p>
+            <a:r>
+              <a:rPr lang="zh-CN" dirty="0"/>
+              <a:t>第 29 节 · 核心知识点：break / continue / while-else</a:t>
+            </a:r>
+          </a:p>
+          <a:p>
+            <a:r>
+              <a:rPr lang="zh-CN" dirty="0"/>
+              <a:t/>
+            </a:r>
+          </a:p>
+          <a:p>
+            <a:r>
+              <a:rPr lang="zh-CN" dirty="0"/>
+              <a:t>讲这一页时：先让学生说出上节课的结论，再逐块讲要点。</a:t>
+            </a:r>
+          </a:p>
+          <a:p>
+            <a:r>
+              <a:rPr lang="zh-CN" dirty="0"/>
+              <a:t>每讲完一块，问一句「这一步如果写错了，报错会长什么样？」——把错误提前讲。</a:t>
+            </a:r>
+          </a:p>
+          <a:p>
+            <a:r>
+              <a:rPr lang="zh-CN" dirty="0"/>
+              <a:t/>
+            </a:r>
+          </a:p>
+          <a:p>
+            <a:r>
+              <a:rPr lang="zh-CN" dirty="0"/>
+              <a:t>本节目标：掌握 break、continue 与 while...else 的执行时机</a:t>
+            </a:r>
+          </a:p>
+          <a:p>
+            <a:r>
+              <a:rPr lang="zh-CN" dirty="0"/>
+              <a:t/>
+            </a:r>
+          </a:p>
+          <a:p>
+            <a:r>
+              <a:rPr lang="zh-CN" dirty="0"/>
+              <a:t>看不到懂的地方，回讲义对应小节读一遍，再回来对着这页复述一次——能讲出来才算真懂。</a:t>
+            </a:r>
+          </a:p>
+        </p:txBody>
+      </p:sp>
+    </p:spTree>
+  </p:cSld>
+  <p:clrMapOvr>
+    <a:masterClrMapping/>
+  </p:clrMapOvr>
+</p:notes>
+</file>
+
+<file path=ppt/notesSlides/notesSlide6.xml><?xml version="1.0" encoding="utf-8"?>
+<p:notes xmlns:a="http://schemas.openxmlformats.org/drawingml/2006/main" xmlns:p="http://schemas.openxmlformats.org/presentationml/2006/main" xmlns:r="http://schemas.openxmlformats.org/officeDocument/2006/relationships">
+  <p:cSld>
+    <p:spTree>
+      <p:nvGrpSpPr>
+        <p:cNvPr id="1" name=""/>
+        <p:cNvGrpSpPr/>
+        <p:nvPr/>
+      </p:nvGrpSpPr>
+      <p:grpSpPr>
+        <a:xfrm>
+          <a:off x="0" y="0"/>
+          <a:ext cx="0" cy="0"/>
+          <a:chOff x="0" y="0"/>
+          <a:chExt cx="0" cy="0"/>
+        </a:xfrm>
+      </p:grpSpPr>
+      <p:sp>
+        <p:nvSpPr>
+          <p:cNvPr id="2" name="讲课提示"/>
+          <p:cNvSpPr txBox="1"/>
+          <p:nvPr/>
+        </p:nvSpPr>
+        <p:spPr>
+          <a:xfrm>
+            <a:off x="457200" y="457200"/>
+            <a:ext cx="6858000" cy="4800600"/>
+          </a:xfrm>
+          <a:prstGeom prst="rect">
+            <a:avLst/>
+          </a:prstGeom>
+        </p:spPr>
+        <p:txBody>
+          <a:bodyPr wrap="square"/>
+          <a:lstStyle/>
+          <a:p>
+            <a:r>
+              <a:rPr lang="zh-CN" dirty="0"/>
+              <a:t>第 30 节 · 交互程序的骨架与收尾</a:t>
+            </a:r>
+          </a:p>
+          <a:p>
+            <a:r>
+              <a:rPr lang="zh-CN" dirty="0"/>
+              <a:t>单元 6 · 用户输入与 while 循环 · W6</a:t>
+            </a:r>
+          </a:p>
+          <a:p>
+            <a:r>
+              <a:rPr lang="zh-CN" dirty="0"/>
+              <a:t/>
+            </a:r>
+          </a:p>
+          <a:p>
+            <a:r>
+              <a:rPr lang="zh-CN" dirty="0"/>
+              <a:t>学习目标：能组装出「提示 → 输入 → 校验 → 处理」的完整交互程序</a:t>
+            </a:r>
+          </a:p>
+          <a:p>
+            <a:r>
+              <a:rPr lang="zh-CN" dirty="0"/>
+              <a:t/>
+            </a:r>
+          </a:p>
+          <a:p>
+            <a:r>
+              <a:rPr lang="zh-CN" dirty="0"/>
+              <a:t>课堂实操（40 分钟，不看答案）：</a:t>
+            </a:r>
+          </a:p>
+          <a:p>
+            <a:r>
+              <a:rPr lang="zh-CN" dirty="0"/>
+              <a:t>· 现场把 input + int + if + while 组装成一个完整程序</a:t>
+            </a:r>
+          </a:p>
+          <a:p>
+            <a:r>
+              <a:rPr lang="zh-CN" dirty="0"/>
+              <a:t/>
+            </a:r>
+          </a:p>
+          <a:p>
+            <a:r>
+              <a:rPr lang="zh-CN" dirty="0"/>
+              <a:t>课后作业：</a:t>
+            </a:r>
+          </a:p>
+          <a:p>
+            <a:r>
+              <a:rPr lang="zh-CN" dirty="0"/>
+              <a:t>· ★ 动手项目 7.5–7.9 投票统计 + 7.10 收银机</a:t>
+            </a:r>
+          </a:p>
+          <a:p>
+            <a:r>
+              <a:rPr lang="zh-CN" dirty="0"/>
+              <a:t/>
+            </a:r>
+          </a:p>
+          <a:p>
+            <a:r>
+              <a:rPr lang="zh-CN" dirty="0"/>
+              <a:t>节奏：讲 20 分钟 → 学员自己敲 40 分钟（不看答案）→ 对讲评自查 20 分钟 → 写作业 10 分钟。</a:t>
+            </a:r>
+          </a:p>
+        </p:txBody>
+      </p:sp>
+    </p:spTree>
+  </p:cSld>
+  <p:clrMapOvr>
+    <a:masterClrMapping/>
+  </p:clrMapOvr>
+</p:notes>
+</file>
+
+<file path=ppt/notesSlides/notesSlide7.xml><?xml version="1.0" encoding="utf-8"?>
+<p:notes xmlns:a="http://schemas.openxmlformats.org/drawingml/2006/main" xmlns:p="http://schemas.openxmlformats.org/presentationml/2006/main" xmlns:r="http://schemas.openxmlformats.org/officeDocument/2006/relationships">
+  <p:cSld>
+    <p:spTree>
+      <p:nvGrpSpPr>
+        <p:cNvPr id="1" name=""/>
+        <p:cNvGrpSpPr/>
+        <p:nvPr/>
+      </p:nvGrpSpPr>
+      <p:grpSpPr>
+        <a:xfrm>
+          <a:off x="0" y="0"/>
+          <a:ext cx="0" cy="0"/>
+          <a:chOff x="0" y="0"/>
+          <a:chExt cx="0" cy="0"/>
+        </a:xfrm>
+      </p:grpSpPr>
+      <p:sp>
+        <p:nvSpPr>
+          <p:cNvPr id="2" name="讲课提示"/>
+          <p:cNvSpPr txBox="1"/>
+          <p:nvPr/>
+        </p:nvSpPr>
+        <p:spPr>
+          <a:xfrm>
+            <a:off x="457200" y="457200"/>
+            <a:ext cx="6858000" cy="4800600"/>
+          </a:xfrm>
+          <a:prstGeom prst="rect">
+            <a:avLst/>
+          </a:prstGeom>
+        </p:spPr>
+        <p:txBody>
+          <a:bodyPr wrap="square"/>
+          <a:lstStyle/>
+          <a:p>
+            <a:r>
+              <a:rPr lang="zh-CN" dirty="0"/>
+              <a:t>第 30 节 · 核心知识点：交互程序的骨架与收尾</a:t>
+            </a:r>
+          </a:p>
+          <a:p>
+            <a:r>
+              <a:rPr lang="zh-CN" dirty="0"/>
+              <a:t/>
+            </a:r>
+          </a:p>
+          <a:p>
+            <a:r>
+              <a:rPr lang="zh-CN" dirty="0"/>
+              <a:t>讲这一页时：先让学生说出上节课的结论，再逐块讲要点。</a:t>
+            </a:r>
+          </a:p>
+          <a:p>
+            <a:r>
+              <a:rPr lang="zh-CN" dirty="0"/>
+              <a:t>每讲完一块，问一句「这一步如果写错了，报错会长什么样？」——把错误提前讲。</a:t>
+            </a:r>
+          </a:p>
+          <a:p>
+            <a:r>
+              <a:rPr lang="zh-CN" dirty="0"/>
+              <a:t/>
+            </a:r>
+          </a:p>
+          <a:p>
+            <a:r>
+              <a:rPr lang="zh-CN" dirty="0"/>
+              <a:t>本节目标：能组装出「提示 → 输入 → 校验 → 处理」的完整交互程序</a:t>
+            </a:r>
+          </a:p>
+          <a:p>
+            <a:r>
+              <a:rPr lang="zh-CN" dirty="0"/>
+              <a:t/>
+            </a:r>
+          </a:p>
+          <a:p>
+            <a:r>
+              <a:rPr lang="zh-CN" dirty="0"/>
+              <a:t>看不到懂的地方，回讲义对应小节读一遍，再回来对着这页复述一次——能讲出来才算真懂。</a:t>
+            </a:r>
+          </a:p>
+        </p:txBody>
+      </p:sp>
+    </p:spTree>
+  </p:cSld>
+  <p:clrMapOvr>
+    <a:masterClrMapping/>
+  </p:clrMapOvr>
+</p:notes>
+</file>
+
+<file path=ppt/notesSlides/notesSlide8.xml><?xml version="1.0" encoding="utf-8"?>
+<p:notes xmlns:a="http://schemas.openxmlformats.org/drawingml/2006/main" xmlns:p="http://schemas.openxmlformats.org/presentationml/2006/main" xmlns:r="http://schemas.openxmlformats.org/officeDocument/2006/relationships">
+  <p:cSld>
+    <p:spTree>
+      <p:nvGrpSpPr>
+        <p:cNvPr id="1" name=""/>
+        <p:cNvGrpSpPr/>
+        <p:nvPr/>
+      </p:nvGrpSpPr>
+      <p:grpSpPr>
+        <a:xfrm>
+          <a:off x="0" y="0"/>
+          <a:ext cx="0" cy="0"/>
+          <a:chOff x="0" y="0"/>
+          <a:chExt cx="0" cy="0"/>
+        </a:xfrm>
+      </p:grpSpPr>
+      <p:sp>
+        <p:nvSpPr>
+          <p:cNvPr id="2" name="讲课提示"/>
+          <p:cNvSpPr txBox="1"/>
+          <p:nvPr/>
+        </p:nvSpPr>
+        <p:spPr>
+          <a:xfrm>
+            <a:off x="457200" y="457200"/>
+            <a:ext cx="6858000" cy="4800600"/>
+          </a:xfrm>
+          <a:prstGeom prst="rect">
+            <a:avLst/>
+          </a:prstGeom>
+        </p:spPr>
+        <p:txBody>
+          <a:bodyPr wrap="square"/>
+          <a:lstStyle/>
+          <a:p>
+            <a:r>
+              <a:rPr lang="zh-CN" dirty="0"/>
+              <a:t>第 31 节 · 动手实战与答案讲评</a:t>
+            </a:r>
+          </a:p>
+          <a:p>
+            <a:r>
+              <a:rPr lang="zh-CN" dirty="0"/>
+              <a:t>单元 6 · 用户输入与 while 循环 · W6</a:t>
+            </a:r>
+          </a:p>
+          <a:p>
+            <a:r>
+              <a:rPr lang="zh-CN" dirty="0"/>
+              <a:t/>
+            </a:r>
+          </a:p>
+          <a:p>
+            <a:r>
+              <a:rPr lang="zh-CN" dirty="0"/>
+              <a:t>学习目标：独立完成单元 6 练习，能写带校验的交互循环</a:t>
+            </a:r>
+          </a:p>
+          <a:p>
+            <a:r>
+              <a:rPr lang="zh-CN" dirty="0"/>
+              <a:t/>
+            </a:r>
+          </a:p>
+          <a:p>
+            <a:r>
+              <a:rPr lang="zh-CN" dirty="0"/>
+              <a:t>课堂实操（40 分钟，不看答案）：</a:t>
+            </a:r>
+          </a:p>
+          <a:p>
+            <a:r>
+              <a:rPr lang="zh-CN" dirty="0"/>
+              <a:t>· 限时 30 分钟独立完成基础档</a:t>
+            </a:r>
+          </a:p>
+          <a:p>
+            <a:r>
+              <a:rPr lang="zh-CN" dirty="0"/>
+              <a:t>· 逐题对照答案讲评</a:t>
+            </a:r>
+          </a:p>
+          <a:p>
+            <a:r>
+              <a:rPr lang="zh-CN" dirty="0"/>
+              <a:t/>
+            </a:r>
+          </a:p>
+          <a:p>
+            <a:r>
+              <a:rPr lang="zh-CN" dirty="0"/>
+              <a:t>课后作业：</a:t>
+            </a:r>
+          </a:p>
+          <a:p>
+            <a:r>
+              <a:rPr lang="zh-CN" dirty="0"/>
+              <a:t>· 产出：带输入校验的投票统计</a:t>
+            </a:r>
+          </a:p>
+          <a:p>
+            <a:r>
+              <a:rPr lang="zh-CN" dirty="0"/>
+              <a:t/>
+            </a:r>
+          </a:p>
+          <a:p>
+            <a:r>
+              <a:rPr lang="zh-CN" dirty="0"/>
+              <a:t>节奏：讲 20 分钟 → 学员自己敲 40 分钟（不看答案）→ 对讲评自查 20 分钟 → 写作业 10 分钟。</a:t>
+            </a:r>
+          </a:p>
+        </p:txBody>
+      </p:sp>
+    </p:spTree>
+  </p:cSld>
+  <p:clrMapOvr>
+    <a:masterClrMapping/>
+  </p:clrMapOvr>
+</p:notes>
+</file>
+
+<file path=ppt/notesSlides/notesSlide9.xml><?xml version="1.0" encoding="utf-8"?>
+<p:notes xmlns:a="http://schemas.openxmlformats.org/drawingml/2006/main" xmlns:p="http://schemas.openxmlformats.org/presentationml/2006/main" xmlns:r="http://schemas.openxmlformats.org/officeDocument/2006/relationships">
+  <p:cSld>
+    <p:spTree>
+      <p:nvGrpSpPr>
+        <p:cNvPr id="1" name=""/>
+        <p:cNvGrpSpPr/>
+        <p:nvPr/>
+      </p:nvGrpSpPr>
+      <p:grpSpPr>
+        <a:xfrm>
+          <a:off x="0" y="0"/>
+          <a:ext cx="0" cy="0"/>
+          <a:chOff x="0" y="0"/>
+          <a:chExt cx="0" cy="0"/>
+        </a:xfrm>
+      </p:grpSpPr>
+      <p:sp>
+        <p:nvSpPr>
+          <p:cNvPr id="2" name="讲课提示"/>
+          <p:cNvSpPr txBox="1"/>
+          <p:nvPr/>
+        </p:nvSpPr>
+        <p:spPr>
+          <a:xfrm>
+            <a:off x="457200" y="457200"/>
+            <a:ext cx="6858000" cy="4800600"/>
+          </a:xfrm>
+          <a:prstGeom prst="rect">
+            <a:avLst/>
+          </a:prstGeom>
+        </p:spPr>
+        <p:txBody>
+          <a:bodyPr wrap="square"/>
+          <a:lstStyle/>
+          <a:p>
+            <a:r>
+              <a:rPr lang="zh-CN" dirty="0"/>
+              <a:t>第 31 节 · 核心知识点：动手实战与答案讲评</a:t>
+            </a:r>
+          </a:p>
+          <a:p>
+            <a:r>
+              <a:rPr lang="zh-CN" dirty="0"/>
+              <a:t/>
+            </a:r>
+          </a:p>
+          <a:p>
+            <a:r>
+              <a:rPr lang="zh-CN" dirty="0"/>
+              <a:t>讲这一页时：先让学生说出上节课的结论，再逐块讲要点。</a:t>
+            </a:r>
+          </a:p>
+          <a:p>
+            <a:r>
+              <a:rPr lang="zh-CN" dirty="0"/>
+              <a:t>每讲完一块，问一句「这一步如果写错了，报错会长什么样？」——把错误提前讲。</a:t>
+            </a:r>
+          </a:p>
+          <a:p>
+            <a:r>
+              <a:rPr lang="zh-CN" dirty="0"/>
+              <a:t/>
+            </a:r>
+          </a:p>
+          <a:p>
+            <a:r>
+              <a:rPr lang="zh-CN" dirty="0"/>
+              <a:t>本节目标：独立完成单元 6 练习，能写带校验的交互循环</a:t>
+            </a:r>
+          </a:p>
+          <a:p>
+            <a:r>
+              <a:rPr lang="zh-CN" dirty="0"/>
+              <a:t/>
+            </a:r>
+          </a:p>
+          <a:p>
+            <a:r>
+              <a:rPr lang="zh-CN" dirty="0"/>
+              <a:t>看不到懂的地方，回讲义对应小节读一遍，再回来对着这页复述一次——能讲出来才算真懂。</a:t>
+            </a:r>
+          </a:p>
+        </p:txBody>
+      </p:sp>
+    </p:spTree>
+  </p:cSld>
+  <p:clrMapOvr>
+    <a:masterClrMapping/>
+  </p:clrMapOvr>
+</p:notes>
 </file>
 
 <file path=ppt/slideLayouts/slideLayout1.xml><?xml version="1.0" encoding="utf-8"?>
